--- a/PRESENTATION.pptx
+++ b/PRESENTATION.pptx
@@ -4,6 +4,9 @@
   <p:sldMasterIdLst>
     <p:sldMasterId id="2147483648" r:id="rId1"/>
   </p:sldMasterIdLst>
+  <p:notesMasterIdLst>
+    <p:notesMasterId r:id="rId14"/>
+  </p:notesMasterIdLst>
   <p:sldIdLst>
     <p:sldId id="256" r:id="rId2"/>
     <p:sldId id="257" r:id="rId3"/>
@@ -18,9 +21,6 @@
     <p:sldId id="266" r:id="rId12"/>
     <p:sldId id="267" r:id="rId13"/>
   </p:sldIdLst>
-  <p:notesMasterIdLst>
-    <p:notesMasterId r:id="rId14"/>
-  </p:notesMasterIdLst>
   <p:sldSz cx="12192000" cy="6858000"/>
   <p:notesSz cx="6858000" cy="12192000"/>
   <p:defaultTextStyle>
@@ -115,18 +115,26 @@
       </a:defRPr>
     </a:lvl9pPr>
   </p:defaultTextStyle>
+  <p:extLst>
+    <p:ext uri="{EFAFB233-063F-42B5-8137-9DF3F51BA10A}">
+      <p15:sldGuideLst xmlns:p15="http://schemas.microsoft.com/office/powerpoint/2012/main"/>
+    </p:ext>
+  </p:extLst>
 </p:presentation>
 </file>
 
 <file path=ppt/charts/chart1.xml><?xml version="1.0" encoding="utf-8"?>
-<c:chartSpace xmlns:c="http://schemas.openxmlformats.org/drawingml/2006/chart" xmlns:a="http://schemas.openxmlformats.org/drawingml/2006/main" xmlns:r="http://schemas.openxmlformats.org/officeDocument/2006/relationships">
+<c:chartSpace xmlns:c="http://schemas.openxmlformats.org/drawingml/2006/chart" xmlns:a="http://schemas.openxmlformats.org/drawingml/2006/main" xmlns:r="http://schemas.openxmlformats.org/officeDocument/2006/relationships" xmlns:c16r2="http://schemas.microsoft.com/office/drawing/2015/06/chart">
   <c:date1904 val="0"/>
+  <c:lang val="en-US"/>
   <c:roundedCorners val="1"/>
+  <c:style val="2"/>
   <c:chart>
     <c:autoTitleDeleted val="1"/>
     <c:plotArea>
       <c:layout/>
       <c:lineChart>
+        <c:grouping val="standard"/>
         <c:varyColors val="0"/>
         <c:ser>
           <c:idx val="0"/>
@@ -143,9 +151,6 @@
             </c:strRef>
           </c:tx>
           <c:spPr>
-            <a:solidFill>
-              <a:srgbClr val="9BB3C7"/>
-            </a:solidFill>
             <a:ln w="31750" cap="flat">
               <a:solidFill>
                 <a:srgbClr val="9BB3C7"/>
@@ -155,180 +160,139 @@
             </a:ln>
             <a:effectLst/>
           </c:spPr>
-          <c:invertIfNegative val="0"/>
-          <c:dLbls>
-            <c:numFmt formatCode="#,##0" sourceLinked="0"/>
-            <c:txPr>
-              <a:bodyPr/>
-              <a:lstStyle/>
-              <a:p>
-                <a:pPr>
-                  <a:defRPr b="0" i="0" strike="noStrike" sz="1200" u="none">
-                    <a:solidFill>
-                      <a:srgbClr val="000000"/>
-                    </a:solidFill>
-                    <a:latin typeface="Arial"/>
-                  </a:defRPr>
-                </a:pPr>
-              </a:p>
-            </c:txPr>
-            <c:showLegendKey val="0"/>
-            <c:showVal val="0"/>
-            <c:showCatName val="0"/>
-            <c:showSerName val="0"/>
-            <c:showPercent val="0"/>
-            <c:showBubbleSize val="0"/>
-            <c:showLeaderLines val="0"/>
-          </c:dLbls>
           <c:marker>
             <c:symbol val="none"/>
-            <c:size val="6"/>
-            <c:spPr>
-              <a:solidFill>
-                <a:srgbClr val="9BB3C7"/>
-              </a:solidFill>
-              <a:ln w="9525" cap="flat">
-                <a:solidFill>
-                  <a:srgbClr val="9BB3C7"/>
-                </a:solidFill>
-                <a:prstDash val="solid"/>
-                <a:round/>
-              </a:ln>
-              <a:effectLst/>
-            </c:spPr>
           </c:marker>
           <c:cat>
-            <c:multiLvlStrRef>
+            <c:strRef>
               <c:f>Sheet1!$A$2:$A$42</c:f>
-              <c:multiLvlStrCache>
+              <c:strCache>
                 <c:ptCount val="41"/>
-                <c:lvl>
-                  <c:pt idx="0">
-                    <c:v>Jul 01</c:v>
-                  </c:pt>
-                  <c:pt idx="1">
-                    <c:v>  </c:v>
-                  </c:pt>
-                  <c:pt idx="2">
-                    <c:v>   </c:v>
-                  </c:pt>
-                  <c:pt idx="3">
-                    <c:v>    </c:v>
-                  </c:pt>
-                  <c:pt idx="4">
-                    <c:v>     </c:v>
-                  </c:pt>
-                  <c:pt idx="5">
-                    <c:v>      </c:v>
-                  </c:pt>
-                  <c:pt idx="6">
-                    <c:v>       </c:v>
-                  </c:pt>
-                  <c:pt idx="7">
-                    <c:v>        </c:v>
-                  </c:pt>
-                  <c:pt idx="8">
-                    <c:v>Jul 09</c:v>
-                  </c:pt>
-                  <c:pt idx="9">
-                    <c:v>  </c:v>
-                  </c:pt>
-                  <c:pt idx="10">
-                    <c:v>   </c:v>
-                  </c:pt>
-                  <c:pt idx="11">
-                    <c:v>    </c:v>
-                  </c:pt>
-                  <c:pt idx="12">
-                    <c:v>     </c:v>
-                  </c:pt>
-                  <c:pt idx="13">
-                    <c:v>      </c:v>
-                  </c:pt>
-                  <c:pt idx="14">
-                    <c:v>       </c:v>
-                  </c:pt>
-                  <c:pt idx="15">
-                    <c:v>        </c:v>
-                  </c:pt>
-                  <c:pt idx="16">
-                    <c:v>Jul 18</c:v>
-                  </c:pt>
-                  <c:pt idx="17">
-                    <c:v>  </c:v>
-                  </c:pt>
-                  <c:pt idx="18">
-                    <c:v>   </c:v>
-                  </c:pt>
-                  <c:pt idx="19">
-                    <c:v>    </c:v>
-                  </c:pt>
-                  <c:pt idx="20">
-                    <c:v>     </c:v>
-                  </c:pt>
-                  <c:pt idx="21">
-                    <c:v>      </c:v>
-                  </c:pt>
-                  <c:pt idx="22">
-                    <c:v>       </c:v>
-                  </c:pt>
-                  <c:pt idx="23">
-                    <c:v>        </c:v>
-                  </c:pt>
-                  <c:pt idx="24">
-                    <c:v>Jul 27</c:v>
-                  </c:pt>
-                  <c:pt idx="25">
-                    <c:v>  </c:v>
-                  </c:pt>
-                  <c:pt idx="26">
-                    <c:v>   </c:v>
-                  </c:pt>
-                  <c:pt idx="27">
-                    <c:v>    </c:v>
-                  </c:pt>
-                  <c:pt idx="28">
-                    <c:v>     </c:v>
-                  </c:pt>
-                  <c:pt idx="29">
-                    <c:v>      </c:v>
-                  </c:pt>
-                  <c:pt idx="30">
-                    <c:v>       </c:v>
-                  </c:pt>
-                  <c:pt idx="31">
-                    <c:v>        </c:v>
-                  </c:pt>
-                  <c:pt idx="32">
-                    <c:v>Aug 05</c:v>
-                  </c:pt>
-                  <c:pt idx="33">
-                    <c:v>  </c:v>
-                  </c:pt>
-                  <c:pt idx="34">
-                    <c:v>   </c:v>
-                  </c:pt>
-                  <c:pt idx="35">
-                    <c:v>    </c:v>
-                  </c:pt>
-                  <c:pt idx="36">
-                    <c:v>     </c:v>
-                  </c:pt>
-                  <c:pt idx="37">
-                    <c:v>      </c:v>
-                  </c:pt>
-                  <c:pt idx="38">
-                    <c:v>       </c:v>
-                  </c:pt>
-                  <c:pt idx="39">
-                    <c:v>        </c:v>
-                  </c:pt>
-                  <c:pt idx="40">
-                    <c:v>Aug 13</c:v>
-                  </c:pt>
-                </c:lvl>
-              </c:multiLvlStrCache>
-            </c:multiLvlStrRef>
+                <c:pt idx="0">
+                  <c:v>Jul 01</c:v>
+                </c:pt>
+                <c:pt idx="1">
+                  <c:v>  </c:v>
+                </c:pt>
+                <c:pt idx="2">
+                  <c:v>   </c:v>
+                </c:pt>
+                <c:pt idx="3">
+                  <c:v>    </c:v>
+                </c:pt>
+                <c:pt idx="4">
+                  <c:v>     </c:v>
+                </c:pt>
+                <c:pt idx="5">
+                  <c:v>      </c:v>
+                </c:pt>
+                <c:pt idx="6">
+                  <c:v>       </c:v>
+                </c:pt>
+                <c:pt idx="7">
+                  <c:v>        </c:v>
+                </c:pt>
+                <c:pt idx="8">
+                  <c:v>Jul 09</c:v>
+                </c:pt>
+                <c:pt idx="9">
+                  <c:v>  </c:v>
+                </c:pt>
+                <c:pt idx="10">
+                  <c:v>   </c:v>
+                </c:pt>
+                <c:pt idx="11">
+                  <c:v>    </c:v>
+                </c:pt>
+                <c:pt idx="12">
+                  <c:v>     </c:v>
+                </c:pt>
+                <c:pt idx="13">
+                  <c:v>      </c:v>
+                </c:pt>
+                <c:pt idx="14">
+                  <c:v>       </c:v>
+                </c:pt>
+                <c:pt idx="15">
+                  <c:v>        </c:v>
+                </c:pt>
+                <c:pt idx="16">
+                  <c:v>Jul 18</c:v>
+                </c:pt>
+                <c:pt idx="17">
+                  <c:v>  </c:v>
+                </c:pt>
+                <c:pt idx="18">
+                  <c:v>   </c:v>
+                </c:pt>
+                <c:pt idx="19">
+                  <c:v>    </c:v>
+                </c:pt>
+                <c:pt idx="20">
+                  <c:v>     </c:v>
+                </c:pt>
+                <c:pt idx="21">
+                  <c:v>      </c:v>
+                </c:pt>
+                <c:pt idx="22">
+                  <c:v>       </c:v>
+                </c:pt>
+                <c:pt idx="23">
+                  <c:v>        </c:v>
+                </c:pt>
+                <c:pt idx="24">
+                  <c:v>Jul 27</c:v>
+                </c:pt>
+                <c:pt idx="25">
+                  <c:v>  </c:v>
+                </c:pt>
+                <c:pt idx="26">
+                  <c:v>   </c:v>
+                </c:pt>
+                <c:pt idx="27">
+                  <c:v>    </c:v>
+                </c:pt>
+                <c:pt idx="28">
+                  <c:v>     </c:v>
+                </c:pt>
+                <c:pt idx="29">
+                  <c:v>      </c:v>
+                </c:pt>
+                <c:pt idx="30">
+                  <c:v>       </c:v>
+                </c:pt>
+                <c:pt idx="31">
+                  <c:v>        </c:v>
+                </c:pt>
+                <c:pt idx="32">
+                  <c:v>Aug 05</c:v>
+                </c:pt>
+                <c:pt idx="33">
+                  <c:v>  </c:v>
+                </c:pt>
+                <c:pt idx="34">
+                  <c:v>   </c:v>
+                </c:pt>
+                <c:pt idx="35">
+                  <c:v>    </c:v>
+                </c:pt>
+                <c:pt idx="36">
+                  <c:v>     </c:v>
+                </c:pt>
+                <c:pt idx="37">
+                  <c:v>      </c:v>
+                </c:pt>
+                <c:pt idx="38">
+                  <c:v>       </c:v>
+                </c:pt>
+                <c:pt idx="39">
+                  <c:v>        </c:v>
+                </c:pt>
+                <c:pt idx="40">
+                  <c:v>Aug 13</c:v>
+                </c:pt>
+              </c:strCache>
+            </c:strRef>
           </c:cat>
           <c:val>
             <c:numRef>
@@ -337,22 +301,22 @@
                 <c:formatCode>General</c:formatCode>
                 <c:ptCount val="41"/>
                 <c:pt idx="0">
-                  <c:v>133.3</c:v>
+                  <c:v>133.30000000000001</c:v>
                 </c:pt>
                 <c:pt idx="1">
                   <c:v>133.1</c:v>
                 </c:pt>
                 <c:pt idx="2">
-                  <c:v>134.2</c:v>
+                  <c:v>134.19999999999999</c:v>
                 </c:pt>
                 <c:pt idx="3">
                   <c:v>119.8</c:v>
                 </c:pt>
                 <c:pt idx="4">
-                  <c:v>139.2</c:v>
+                  <c:v>139.19999999999999</c:v>
                 </c:pt>
                 <c:pt idx="5">
-                  <c:v>131.3</c:v>
+                  <c:v>131.30000000000001</c:v>
                 </c:pt>
                 <c:pt idx="6">
                   <c:v>140</c:v>
@@ -376,7 +340,7 @@
                   <c:v>128.9</c:v>
                 </c:pt>
                 <c:pt idx="13">
-                  <c:v>139.2</c:v>
+                  <c:v>139.19999999999999</c:v>
                 </c:pt>
                 <c:pt idx="14">
                   <c:v>123.7</c:v>
@@ -391,31 +355,31 @@
                   <c:v>124.9</c:v>
                 </c:pt>
                 <c:pt idx="18">
-                  <c:v>134.7</c:v>
+                  <c:v>134.69999999999999</c:v>
                 </c:pt>
                 <c:pt idx="19">
-                  <c:v>129.2</c:v>
+                  <c:v>129.19999999999999</c:v>
                 </c:pt>
                 <c:pt idx="20">
-                  <c:v>138.3</c:v>
+                  <c:v>138.30000000000001</c:v>
                 </c:pt>
                 <c:pt idx="21">
-                  <c:v>138.3</c:v>
+                  <c:v>138.30000000000001</c:v>
                 </c:pt>
                 <c:pt idx="22">
-                  <c:v>129.7</c:v>
+                  <c:v>129.69999999999999</c:v>
                 </c:pt>
                 <c:pt idx="23">
-                  <c:v>128.8</c:v>
+                  <c:v>128.80000000000001</c:v>
                 </c:pt>
                 <c:pt idx="24">
-                  <c:v>128.8</c:v>
+                  <c:v>128.80000000000001</c:v>
                 </c:pt>
                 <c:pt idx="25">
                   <c:v>123.1</c:v>
                 </c:pt>
                 <c:pt idx="26">
-                  <c:v>136.2</c:v>
+                  <c:v>136.19999999999999</c:v>
                 </c:pt>
                 <c:pt idx="27">
                   <c:v>129.9</c:v>
@@ -424,7 +388,7 @@
                   <c:v>127</c:v>
                 </c:pt>
                 <c:pt idx="29">
-                  <c:v>133.8</c:v>
+                  <c:v>133.80000000000001</c:v>
                 </c:pt>
                 <c:pt idx="30">
                   <c:v>126.7</c:v>
@@ -439,13 +403,13 @@
                   <c:v>126.6</c:v>
                 </c:pt>
                 <c:pt idx="34">
-                  <c:v>128.3</c:v>
+                  <c:v>128.30000000000001</c:v>
                 </c:pt>
                 <c:pt idx="35">
-                  <c:v>128.2</c:v>
+                  <c:v>128.19999999999999</c:v>
                 </c:pt>
                 <c:pt idx="36">
-                  <c:v>130.3</c:v>
+                  <c:v>130.30000000000001</c:v>
                 </c:pt>
                 <c:pt idx="37">
                   <c:v>122.3</c:v>
@@ -463,6 +427,11 @@
             </c:numRef>
           </c:val>
           <c:smooth val="0"/>
+          <c:extLst>
+            <c:ext xmlns:c16="http://schemas.microsoft.com/office/drawing/2014/chart" uri="{C3380CC4-5D6E-409C-BE32-E72D297353CC}">
+              <c16:uniqueId val="{00000000-3861-4C55-AA5B-A80C60D836B0}"/>
+            </c:ext>
+          </c:extLst>
         </c:ser>
         <c:ser>
           <c:idx val="1"/>
@@ -479,9 +448,6 @@
             </c:strRef>
           </c:tx>
           <c:spPr>
-            <a:solidFill>
-              <a:srgbClr val="0E9F94"/>
-            </a:solidFill>
             <a:ln w="31750" cap="flat">
               <a:solidFill>
                 <a:srgbClr val="0E9F94"/>
@@ -491,180 +457,139 @@
             </a:ln>
             <a:effectLst/>
           </c:spPr>
-          <c:invertIfNegative val="0"/>
-          <c:dLbls>
-            <c:numFmt formatCode="#,##0" sourceLinked="0"/>
-            <c:txPr>
-              <a:bodyPr/>
-              <a:lstStyle/>
-              <a:p>
-                <a:pPr>
-                  <a:defRPr b="0" i="0" strike="noStrike" sz="1200" u="none">
-                    <a:solidFill>
-                      <a:srgbClr val="000000"/>
-                    </a:solidFill>
-                    <a:latin typeface="Arial"/>
-                  </a:defRPr>
-                </a:pPr>
-              </a:p>
-            </c:txPr>
-            <c:showLegendKey val="0"/>
-            <c:showVal val="0"/>
-            <c:showCatName val="0"/>
-            <c:showSerName val="0"/>
-            <c:showPercent val="0"/>
-            <c:showBubbleSize val="0"/>
-            <c:showLeaderLines val="0"/>
-          </c:dLbls>
           <c:marker>
             <c:symbol val="none"/>
-            <c:size val="6"/>
-            <c:spPr>
-              <a:solidFill>
-                <a:srgbClr val="0E9F94"/>
-              </a:solidFill>
-              <a:ln w="9525" cap="flat">
-                <a:solidFill>
-                  <a:srgbClr val="0E9F94"/>
-                </a:solidFill>
-                <a:prstDash val="solid"/>
-                <a:round/>
-              </a:ln>
-              <a:effectLst/>
-            </c:spPr>
           </c:marker>
           <c:cat>
-            <c:multiLvlStrRef>
+            <c:strRef>
               <c:f>Sheet1!$A$2:$A$42</c:f>
-              <c:multiLvlStrCache>
+              <c:strCache>
                 <c:ptCount val="41"/>
-                <c:lvl>
-                  <c:pt idx="0">
-                    <c:v>Jul 01</c:v>
-                  </c:pt>
-                  <c:pt idx="1">
-                    <c:v>  </c:v>
-                  </c:pt>
-                  <c:pt idx="2">
-                    <c:v>   </c:v>
-                  </c:pt>
-                  <c:pt idx="3">
-                    <c:v>    </c:v>
-                  </c:pt>
-                  <c:pt idx="4">
-                    <c:v>     </c:v>
-                  </c:pt>
-                  <c:pt idx="5">
-                    <c:v>      </c:v>
-                  </c:pt>
-                  <c:pt idx="6">
-                    <c:v>       </c:v>
-                  </c:pt>
-                  <c:pt idx="7">
-                    <c:v>        </c:v>
-                  </c:pt>
-                  <c:pt idx="8">
-                    <c:v>Jul 09</c:v>
-                  </c:pt>
-                  <c:pt idx="9">
-                    <c:v>  </c:v>
-                  </c:pt>
-                  <c:pt idx="10">
-                    <c:v>   </c:v>
-                  </c:pt>
-                  <c:pt idx="11">
-                    <c:v>    </c:v>
-                  </c:pt>
-                  <c:pt idx="12">
-                    <c:v>     </c:v>
-                  </c:pt>
-                  <c:pt idx="13">
-                    <c:v>      </c:v>
-                  </c:pt>
-                  <c:pt idx="14">
-                    <c:v>       </c:v>
-                  </c:pt>
-                  <c:pt idx="15">
-                    <c:v>        </c:v>
-                  </c:pt>
-                  <c:pt idx="16">
-                    <c:v>Jul 18</c:v>
-                  </c:pt>
-                  <c:pt idx="17">
-                    <c:v>  </c:v>
-                  </c:pt>
-                  <c:pt idx="18">
-                    <c:v>   </c:v>
-                  </c:pt>
-                  <c:pt idx="19">
-                    <c:v>    </c:v>
-                  </c:pt>
-                  <c:pt idx="20">
-                    <c:v>     </c:v>
-                  </c:pt>
-                  <c:pt idx="21">
-                    <c:v>      </c:v>
-                  </c:pt>
-                  <c:pt idx="22">
-                    <c:v>       </c:v>
-                  </c:pt>
-                  <c:pt idx="23">
-                    <c:v>        </c:v>
-                  </c:pt>
-                  <c:pt idx="24">
-                    <c:v>Jul 27</c:v>
-                  </c:pt>
-                  <c:pt idx="25">
-                    <c:v>  </c:v>
-                  </c:pt>
-                  <c:pt idx="26">
-                    <c:v>   </c:v>
-                  </c:pt>
-                  <c:pt idx="27">
-                    <c:v>    </c:v>
-                  </c:pt>
-                  <c:pt idx="28">
-                    <c:v>     </c:v>
-                  </c:pt>
-                  <c:pt idx="29">
-                    <c:v>      </c:v>
-                  </c:pt>
-                  <c:pt idx="30">
-                    <c:v>       </c:v>
-                  </c:pt>
-                  <c:pt idx="31">
-                    <c:v>        </c:v>
-                  </c:pt>
-                  <c:pt idx="32">
-                    <c:v>Aug 05</c:v>
-                  </c:pt>
-                  <c:pt idx="33">
-                    <c:v>  </c:v>
-                  </c:pt>
-                  <c:pt idx="34">
-                    <c:v>   </c:v>
-                  </c:pt>
-                  <c:pt idx="35">
-                    <c:v>    </c:v>
-                  </c:pt>
-                  <c:pt idx="36">
-                    <c:v>     </c:v>
-                  </c:pt>
-                  <c:pt idx="37">
-                    <c:v>      </c:v>
-                  </c:pt>
-                  <c:pt idx="38">
-                    <c:v>       </c:v>
-                  </c:pt>
-                  <c:pt idx="39">
-                    <c:v>        </c:v>
-                  </c:pt>
-                  <c:pt idx="40">
-                    <c:v>Aug 13</c:v>
-                  </c:pt>
-                </c:lvl>
-              </c:multiLvlStrCache>
-            </c:multiLvlStrRef>
+                <c:pt idx="0">
+                  <c:v>Jul 01</c:v>
+                </c:pt>
+                <c:pt idx="1">
+                  <c:v>  </c:v>
+                </c:pt>
+                <c:pt idx="2">
+                  <c:v>   </c:v>
+                </c:pt>
+                <c:pt idx="3">
+                  <c:v>    </c:v>
+                </c:pt>
+                <c:pt idx="4">
+                  <c:v>     </c:v>
+                </c:pt>
+                <c:pt idx="5">
+                  <c:v>      </c:v>
+                </c:pt>
+                <c:pt idx="6">
+                  <c:v>       </c:v>
+                </c:pt>
+                <c:pt idx="7">
+                  <c:v>        </c:v>
+                </c:pt>
+                <c:pt idx="8">
+                  <c:v>Jul 09</c:v>
+                </c:pt>
+                <c:pt idx="9">
+                  <c:v>  </c:v>
+                </c:pt>
+                <c:pt idx="10">
+                  <c:v>   </c:v>
+                </c:pt>
+                <c:pt idx="11">
+                  <c:v>    </c:v>
+                </c:pt>
+                <c:pt idx="12">
+                  <c:v>     </c:v>
+                </c:pt>
+                <c:pt idx="13">
+                  <c:v>      </c:v>
+                </c:pt>
+                <c:pt idx="14">
+                  <c:v>       </c:v>
+                </c:pt>
+                <c:pt idx="15">
+                  <c:v>        </c:v>
+                </c:pt>
+                <c:pt idx="16">
+                  <c:v>Jul 18</c:v>
+                </c:pt>
+                <c:pt idx="17">
+                  <c:v>  </c:v>
+                </c:pt>
+                <c:pt idx="18">
+                  <c:v>   </c:v>
+                </c:pt>
+                <c:pt idx="19">
+                  <c:v>    </c:v>
+                </c:pt>
+                <c:pt idx="20">
+                  <c:v>     </c:v>
+                </c:pt>
+                <c:pt idx="21">
+                  <c:v>      </c:v>
+                </c:pt>
+                <c:pt idx="22">
+                  <c:v>       </c:v>
+                </c:pt>
+                <c:pt idx="23">
+                  <c:v>        </c:v>
+                </c:pt>
+                <c:pt idx="24">
+                  <c:v>Jul 27</c:v>
+                </c:pt>
+                <c:pt idx="25">
+                  <c:v>  </c:v>
+                </c:pt>
+                <c:pt idx="26">
+                  <c:v>   </c:v>
+                </c:pt>
+                <c:pt idx="27">
+                  <c:v>    </c:v>
+                </c:pt>
+                <c:pt idx="28">
+                  <c:v>     </c:v>
+                </c:pt>
+                <c:pt idx="29">
+                  <c:v>      </c:v>
+                </c:pt>
+                <c:pt idx="30">
+                  <c:v>       </c:v>
+                </c:pt>
+                <c:pt idx="31">
+                  <c:v>        </c:v>
+                </c:pt>
+                <c:pt idx="32">
+                  <c:v>Aug 05</c:v>
+                </c:pt>
+                <c:pt idx="33">
+                  <c:v>  </c:v>
+                </c:pt>
+                <c:pt idx="34">
+                  <c:v>   </c:v>
+                </c:pt>
+                <c:pt idx="35">
+                  <c:v>    </c:v>
+                </c:pt>
+                <c:pt idx="36">
+                  <c:v>     </c:v>
+                </c:pt>
+                <c:pt idx="37">
+                  <c:v>      </c:v>
+                </c:pt>
+                <c:pt idx="38">
+                  <c:v>       </c:v>
+                </c:pt>
+                <c:pt idx="39">
+                  <c:v>        </c:v>
+                </c:pt>
+                <c:pt idx="40">
+                  <c:v>Aug 13</c:v>
+                </c:pt>
+              </c:strCache>
+            </c:strRef>
           </c:cat>
           <c:val>
             <c:numRef>
@@ -676,7 +601,7 @@
                   <c:v>132</c:v>
                 </c:pt>
                 <c:pt idx="1">
-                  <c:v>132.8</c:v>
+                  <c:v>132.80000000000001</c:v>
                 </c:pt>
                 <c:pt idx="2">
                   <c:v>133.5</c:v>
@@ -685,10 +610,10 @@
                   <c:v>131.1</c:v>
                 </c:pt>
                 <c:pt idx="4">
-                  <c:v>132.7</c:v>
+                  <c:v>132.69999999999999</c:v>
                 </c:pt>
                 <c:pt idx="5">
-                  <c:v>132.2</c:v>
+                  <c:v>132.19999999999999</c:v>
                 </c:pt>
                 <c:pt idx="6">
                   <c:v>134</c:v>
@@ -697,22 +622,22 @@
                   <c:v>132.9</c:v>
                 </c:pt>
                 <c:pt idx="8">
-                  <c:v>132.3</c:v>
+                  <c:v>132.30000000000001</c:v>
                 </c:pt>
                 <c:pt idx="9">
                   <c:v>132.4</c:v>
                 </c:pt>
                 <c:pt idx="10">
-                  <c:v>132.2</c:v>
+                  <c:v>132.19999999999999</c:v>
                 </c:pt>
                 <c:pt idx="11">
                   <c:v>131.5</c:v>
                 </c:pt>
                 <c:pt idx="12">
-                  <c:v>131.7</c:v>
+                  <c:v>131.69999999999999</c:v>
                 </c:pt>
                 <c:pt idx="13">
-                  <c:v>132.7</c:v>
+                  <c:v>132.69999999999999</c:v>
                 </c:pt>
                 <c:pt idx="14">
                   <c:v>131.5</c:v>
@@ -724,7 +649,7 @@
                   <c:v>131</c:v>
                 </c:pt>
                 <c:pt idx="17">
-                  <c:v>130.2</c:v>
+                  <c:v>130.19999999999999</c:v>
                 </c:pt>
                 <c:pt idx="18">
                   <c:v>131</c:v>
@@ -754,10 +679,10 @@
                   <c:v>130.6</c:v>
                 </c:pt>
                 <c:pt idx="27">
-                  <c:v>130.7</c:v>
+                  <c:v>130.69999999999999</c:v>
                 </c:pt>
                 <c:pt idx="28">
-                  <c:v>130.8</c:v>
+                  <c:v>130.80000000000001</c:v>
                 </c:pt>
                 <c:pt idx="29">
                   <c:v>131.1</c:v>
@@ -769,10 +694,10 @@
                   <c:v>130</c:v>
                 </c:pt>
                 <c:pt idx="32">
-                  <c:v>130.2</c:v>
+                  <c:v>130.19999999999999</c:v>
                 </c:pt>
                 <c:pt idx="33">
-                  <c:v>129.8</c:v>
+                  <c:v>129.80000000000001</c:v>
                 </c:pt>
                 <c:pt idx="34">
                   <c:v>129.9</c:v>
@@ -781,53 +706,41 @@
                   <c:v>129.6</c:v>
                 </c:pt>
                 <c:pt idx="36">
-                  <c:v>129.7</c:v>
+                  <c:v>129.69999999999999</c:v>
                 </c:pt>
                 <c:pt idx="37">
                   <c:v>129.1</c:v>
                 </c:pt>
                 <c:pt idx="38">
-                  <c:v>129.8</c:v>
+                  <c:v>129.80000000000001</c:v>
                 </c:pt>
                 <c:pt idx="39">
                   <c:v>128.5</c:v>
                 </c:pt>
                 <c:pt idx="40">
-                  <c:v>128.7</c:v>
+                  <c:v>128.69999999999999</c:v>
                 </c:pt>
               </c:numCache>
             </c:numRef>
           </c:val>
           <c:smooth val="0"/>
+          <c:extLst>
+            <c:ext xmlns:c16="http://schemas.microsoft.com/office/drawing/2014/chart" uri="{C3380CC4-5D6E-409C-BE32-E72D297353CC}">
+              <c16:uniqueId val="{00000001-3861-4C55-AA5B-A80C60D836B0}"/>
+            </c:ext>
+          </c:extLst>
         </c:ser>
         <c:dLbls>
-          <c:numFmt formatCode="#,##0" sourceLinked="0"/>
-          <c:txPr>
-            <a:bodyPr/>
-            <a:lstStyle/>
-            <a:p>
-              <a:pPr>
-                <a:defRPr b="0" i="0" strike="noStrike" sz="1200" u="none">
-                  <a:solidFill>
-                    <a:srgbClr val="000000"/>
-                  </a:solidFill>
-                  <a:latin typeface="Arial"/>
-                </a:defRPr>
-              </a:pPr>
-            </a:p>
-          </c:txPr>
           <c:showLegendKey val="0"/>
           <c:showVal val="0"/>
           <c:showCatName val="0"/>
           <c:showSerName val="0"/>
           <c:showPercent val="0"/>
           <c:showBubbleSize val="0"/>
-          <c:showLeaderLines val="0"/>
         </c:dLbls>
-        <c:marker val="1"/>
+        <c:smooth val="0"/>
         <c:axId val="2094734554"/>
         <c:axId val="2094734552"/>
-        <c:axId val="2094734556"/>
       </c:lineChart>
       <c:catAx>
         <c:axId val="2094734554"/>
@@ -868,8 +781,9 @@
         <c:crosses val="autoZero"/>
         <c:auto val="1"/>
         <c:lblAlgn val="ctr"/>
+        <c:lblOffset val="100"/>
+        <c:tickLblSkip val="6"/>
         <c:noMultiLvlLbl val="1"/>
-        <c:tickLblSkip val="6"/>
       </c:catAx>
       <c:valAx>
         <c:axId val="2094734552"/>
@@ -906,7 +820,7 @@
                   </a:defRPr>
                 </a:pPr>
                 <a:r>
-                  <a:rPr sz="1100" b="0" i="0" u="none" strike="noStrike">
+                  <a:rPr lang="en-IN" sz="1100" b="0" i="0" u="none" strike="noStrike">
                     <a:solidFill>
                       <a:srgbClr val="64748B"/>
                     </a:solidFill>
@@ -917,7 +831,6 @@
               </a:p>
             </c:rich>
           </c:tx>
-          <c:layout/>
           <c:overlay val="0"/>
         </c:title>
         <c:numFmt formatCode="General" sourceLinked="0"/>
@@ -982,6 +895,7 @@
     </c:legend>
     <c:plotVisOnly val="1"/>
     <c:dispBlanksAs val="span"/>
+    <c:showDLblsOverMax val="1"/>
   </c:chart>
   <c:spPr>
     <a:noFill/>
@@ -997,9 +911,11 @@
 </file>
 
 <file path=ppt/charts/chart2.xml><?xml version="1.0" encoding="utf-8"?>
-<c:chartSpace xmlns:c="http://schemas.openxmlformats.org/drawingml/2006/chart" xmlns:a="http://schemas.openxmlformats.org/drawingml/2006/main" xmlns:r="http://schemas.openxmlformats.org/officeDocument/2006/relationships">
+<c:chartSpace xmlns:c="http://schemas.openxmlformats.org/drawingml/2006/chart" xmlns:a="http://schemas.openxmlformats.org/drawingml/2006/main" xmlns:r="http://schemas.openxmlformats.org/officeDocument/2006/relationships" xmlns:c16r2="http://schemas.microsoft.com/office/drawing/2015/06/chart">
   <c:date1904 val="0"/>
+  <c:lang val="en-US"/>
   <c:roundedCorners val="1"/>
+  <c:style val="2"/>
   <c:chart>
     <c:autoTitleDeleted val="1"/>
     <c:plotArea>
@@ -1029,40 +945,15 @@
             <a:effectLst/>
           </c:spPr>
           <c:invertIfNegative val="0"/>
-          <c:dLbls>
-            <c:numFmt formatCode="0.00" sourceLinked="0"/>
-            <c:txPr>
-              <a:bodyPr/>
-              <a:lstStyle/>
-              <a:p>
-                <a:pPr>
-                  <a:defRPr b="0" i="0" strike="noStrike" sz="1300" u="none">
-                    <a:solidFill>
-                      <a:srgbClr val="1E293B"/>
-                    </a:solidFill>
-                    <a:latin typeface="Arial"/>
-                  </a:defRPr>
-                </a:pPr>
-              </a:p>
-            </c:txPr>
-            <c:showLegendKey val="0"/>
-            <c:showVal val="1"/>
-            <c:showCatName val="0"/>
-            <c:showSerName val="0"/>
-            <c:showPercent val="0"/>
-            <c:showBubbleSize val="0"/>
-            <c:showLeaderLines val="0"/>
-          </c:dLbls>
           <c:dPt>
             <c:idx val="0"/>
             <c:invertIfNegative val="0"/>
             <c:bubble3D val="0"/>
-            <c:spPr>
-              <a:solidFill>
-                <a:srgbClr val="0E9F94"/>
-              </a:solidFill>
-              <a:effectLst/>
-            </c:spPr>
+            <c:extLst>
+              <c:ext xmlns:c16="http://schemas.microsoft.com/office/drawing/2014/chart" uri="{C3380CC4-5D6E-409C-BE32-E72D297353CC}">
+                <c16:uniqueId val="{00000001-FAD8-4CB1-A0B7-1444A1E4F70B}"/>
+              </c:ext>
+            </c:extLst>
           </c:dPt>
           <c:dPt>
             <c:idx val="1"/>
@@ -1074,6 +965,11 @@
               </a:solidFill>
               <a:effectLst/>
             </c:spPr>
+            <c:extLst>
+              <c:ext xmlns:c16="http://schemas.microsoft.com/office/drawing/2014/chart" uri="{C3380CC4-5D6E-409C-BE32-E72D297353CC}">
+                <c16:uniqueId val="{00000003-FAD8-4CB1-A0B7-1444A1E4F70B}"/>
+              </c:ext>
+            </c:extLst>
           </c:dPt>
           <c:dPt>
             <c:idx val="2"/>
@@ -1085,25 +981,65 @@
               </a:solidFill>
               <a:effectLst/>
             </c:spPr>
+            <c:extLst>
+              <c:ext xmlns:c16="http://schemas.microsoft.com/office/drawing/2014/chart" uri="{C3380CC4-5D6E-409C-BE32-E72D297353CC}">
+                <c16:uniqueId val="{00000005-FAD8-4CB1-A0B7-1444A1E4F70B}"/>
+              </c:ext>
+            </c:extLst>
           </c:dPt>
+          <c:dLbls>
+            <c:numFmt formatCode="0.00" sourceLinked="0"/>
+            <c:spPr>
+              <a:noFill/>
+              <a:ln>
+                <a:noFill/>
+              </a:ln>
+              <a:effectLst/>
+            </c:spPr>
+            <c:txPr>
+              <a:bodyPr/>
+              <a:lstStyle/>
+              <a:p>
+                <a:pPr>
+                  <a:defRPr sz="1300" b="0" i="0" u="none" strike="noStrike">
+                    <a:solidFill>
+                      <a:srgbClr val="1E293B"/>
+                    </a:solidFill>
+                    <a:latin typeface="Arial"/>
+                  </a:defRPr>
+                </a:pPr>
+                <a:endParaRPr lang="en-US"/>
+              </a:p>
+            </c:txPr>
+            <c:showLegendKey val="0"/>
+            <c:showVal val="1"/>
+            <c:showCatName val="0"/>
+            <c:showSerName val="0"/>
+            <c:showPercent val="0"/>
+            <c:showBubbleSize val="0"/>
+            <c:showLeaderLines val="0"/>
+            <c:extLst>
+              <c:ext xmlns:c15="http://schemas.microsoft.com/office/drawing/2012/chart" uri="{CE6537A1-D6FC-4f65-9D91-7224C49458BB}">
+                <c15:showLeaderLines val="0"/>
+              </c:ext>
+            </c:extLst>
+          </c:dLbls>
           <c:cat>
-            <c:multiLvlStrRef>
+            <c:strRef>
               <c:f>Sheet1!$A$2:$A$4</c:f>
-              <c:multiLvlStrCache>
+              <c:strCache>
                 <c:ptCount val="3"/>
-                <c:lvl>
-                  <c:pt idx="0">
-                    <c:v>HyperTwin</c:v>
-                  </c:pt>
-                  <c:pt idx="1">
-                    <c:v>7-day mean</c:v>
-                  </c:pt>
-                  <c:pt idx="2">
-                    <c:v>Last reading</c:v>
-                  </c:pt>
-                </c:lvl>
-              </c:multiLvlStrCache>
-            </c:multiLvlStrRef>
+                <c:pt idx="0">
+                  <c:v>HyperTwin</c:v>
+                </c:pt>
+                <c:pt idx="1">
+                  <c:v>7-day mean</c:v>
+                </c:pt>
+                <c:pt idx="2">
+                  <c:v>Last reading</c:v>
+                </c:pt>
+              </c:strCache>
+            </c:strRef>
           </c:cat>
           <c:val>
             <c:numRef>
@@ -1123,36 +1059,23 @@
               </c:numCache>
             </c:numRef>
           </c:val>
+          <c:extLst>
+            <c:ext xmlns:c16="http://schemas.microsoft.com/office/drawing/2014/chart" uri="{C3380CC4-5D6E-409C-BE32-E72D297353CC}">
+              <c16:uniqueId val="{00000006-FAD8-4CB1-A0B7-1444A1E4F70B}"/>
+            </c:ext>
+          </c:extLst>
         </c:ser>
         <c:dLbls>
-          <c:numFmt formatCode="0.00" sourceLinked="0"/>
-          <c:txPr>
-            <a:bodyPr/>
-            <a:lstStyle/>
-            <a:p>
-              <a:pPr>
-                <a:defRPr b="0" i="0" strike="noStrike" sz="1300" u="none">
-                  <a:solidFill>
-                    <a:srgbClr val="1E293B"/>
-                  </a:solidFill>
-                  <a:latin typeface="Arial"/>
-                </a:defRPr>
-              </a:pPr>
-            </a:p>
-          </c:txPr>
           <c:showLegendKey val="0"/>
           <c:showVal val="1"/>
           <c:showCatName val="0"/>
           <c:showSerName val="0"/>
           <c:showPercent val="0"/>
           <c:showBubbleSize val="0"/>
-          <c:showLeaderLines val="0"/>
         </c:dLbls>
         <c:gapWidth val="60"/>
-        <c:overlap val="0"/>
         <c:axId val="2094734554"/>
         <c:axId val="2094734552"/>
-        <c:axId val="2094734556"/>
       </c:barChart>
       <c:catAx>
         <c:axId val="2094734554"/>
@@ -1193,6 +1116,7 @@
         <c:crosses val="autoZero"/>
         <c:auto val="1"/>
         <c:lblAlgn val="ctr"/>
+        <c:lblOffset val="100"/>
         <c:noMultiLvlLbl val="1"/>
       </c:catAx>
       <c:valAx>
@@ -1208,30 +1132,6 @@
         <c:majorTickMark val="out"/>
         <c:minorTickMark val="none"/>
         <c:tickLblPos val="nextTo"/>
-        <c:spPr>
-          <a:ln w="12700" cap="flat">
-            <a:solidFill>
-              <a:srgbClr val="888888"/>
-            </a:solidFill>
-            <a:prstDash val="solid"/>
-            <a:round/>
-          </a:ln>
-        </c:spPr>
-        <c:txPr>
-          <a:bodyPr/>
-          <a:lstStyle/>
-          <a:p>
-            <a:pPr>
-              <a:defRPr sz="1200" b="0" i="0" u="none" strike="noStrike">
-                <a:solidFill>
-                  <a:srgbClr val="000000"/>
-                </a:solidFill>
-                <a:latin typeface="Arial"/>
-              </a:defRPr>
-            </a:pPr>
-            <a:endParaRPr lang="en-US"/>
-          </a:p>
-        </c:txPr>
         <c:crossAx val="2094734554"/>
         <c:crosses val="autoZero"/>
         <c:crossBetween val="between"/>
@@ -1246,6 +1146,7 @@
     </c:plotArea>
     <c:plotVisOnly val="1"/>
     <c:dispBlanksAs val="span"/>
+    <c:showDLblsOverMax val="1"/>
   </c:chart>
   <c:spPr>
     <a:noFill/>
@@ -1261,9 +1162,11 @@
 </file>
 
 <file path=ppt/charts/chart3.xml><?xml version="1.0" encoding="utf-8"?>
-<c:chartSpace xmlns:c="http://schemas.openxmlformats.org/drawingml/2006/chart" xmlns:a="http://schemas.openxmlformats.org/drawingml/2006/main" xmlns:r="http://schemas.openxmlformats.org/officeDocument/2006/relationships">
+<c:chartSpace xmlns:c="http://schemas.openxmlformats.org/drawingml/2006/chart" xmlns:a="http://schemas.openxmlformats.org/drawingml/2006/main" xmlns:r="http://schemas.openxmlformats.org/officeDocument/2006/relationships" xmlns:c16r2="http://schemas.microsoft.com/office/drawing/2015/06/chart">
   <c:date1904 val="0"/>
+  <c:lang val="en-US"/>
   <c:roundedCorners val="1"/>
+  <c:style val="2"/>
   <c:chart>
     <c:autoTitleDeleted val="1"/>
     <c:plotArea>
@@ -1293,40 +1196,15 @@
             <a:effectLst/>
           </c:spPr>
           <c:invertIfNegative val="0"/>
-          <c:dLbls>
-            <c:numFmt formatCode="0.000" sourceLinked="0"/>
-            <c:txPr>
-              <a:bodyPr/>
-              <a:lstStyle/>
-              <a:p>
-                <a:pPr>
-                  <a:defRPr b="0" i="0" strike="noStrike" sz="1300" u="none">
-                    <a:solidFill>
-                      <a:srgbClr val="1E293B"/>
-                    </a:solidFill>
-                    <a:latin typeface="Arial"/>
-                  </a:defRPr>
-                </a:pPr>
-              </a:p>
-            </c:txPr>
-            <c:showLegendKey val="0"/>
-            <c:showVal val="1"/>
-            <c:showCatName val="0"/>
-            <c:showSerName val="0"/>
-            <c:showPercent val="0"/>
-            <c:showBubbleSize val="0"/>
-            <c:showLeaderLines val="0"/>
-          </c:dLbls>
           <c:dPt>
             <c:idx val="0"/>
             <c:invertIfNegative val="0"/>
             <c:bubble3D val="0"/>
-            <c:spPr>
-              <a:solidFill>
-                <a:srgbClr val="0E9F94"/>
-              </a:solidFill>
-              <a:effectLst/>
-            </c:spPr>
+            <c:extLst>
+              <c:ext xmlns:c16="http://schemas.microsoft.com/office/drawing/2014/chart" uri="{C3380CC4-5D6E-409C-BE32-E72D297353CC}">
+                <c16:uniqueId val="{00000001-6BEC-4DA7-9AF1-D0E86A8890E7}"/>
+              </c:ext>
+            </c:extLst>
           </c:dPt>
           <c:dPt>
             <c:idx val="1"/>
@@ -1338,6 +1216,11 @@
               </a:solidFill>
               <a:effectLst/>
             </c:spPr>
+            <c:extLst>
+              <c:ext xmlns:c16="http://schemas.microsoft.com/office/drawing/2014/chart" uri="{C3380CC4-5D6E-409C-BE32-E72D297353CC}">
+                <c16:uniqueId val="{00000003-6BEC-4DA7-9AF1-D0E86A8890E7}"/>
+              </c:ext>
+            </c:extLst>
           </c:dPt>
           <c:dPt>
             <c:idx val="2"/>
@@ -1349,25 +1232,65 @@
               </a:solidFill>
               <a:effectLst/>
             </c:spPr>
+            <c:extLst>
+              <c:ext xmlns:c16="http://schemas.microsoft.com/office/drawing/2014/chart" uri="{C3380CC4-5D6E-409C-BE32-E72D297353CC}">
+                <c16:uniqueId val="{00000005-6BEC-4DA7-9AF1-D0E86A8890E7}"/>
+              </c:ext>
+            </c:extLst>
           </c:dPt>
+          <c:dLbls>
+            <c:numFmt formatCode="0.000" sourceLinked="0"/>
+            <c:spPr>
+              <a:noFill/>
+              <a:ln>
+                <a:noFill/>
+              </a:ln>
+              <a:effectLst/>
+            </c:spPr>
+            <c:txPr>
+              <a:bodyPr/>
+              <a:lstStyle/>
+              <a:p>
+                <a:pPr>
+                  <a:defRPr sz="1300" b="0" i="0" u="none" strike="noStrike">
+                    <a:solidFill>
+                      <a:srgbClr val="1E293B"/>
+                    </a:solidFill>
+                    <a:latin typeface="Arial"/>
+                  </a:defRPr>
+                </a:pPr>
+                <a:endParaRPr lang="en-US"/>
+              </a:p>
+            </c:txPr>
+            <c:showLegendKey val="0"/>
+            <c:showVal val="1"/>
+            <c:showCatName val="0"/>
+            <c:showSerName val="0"/>
+            <c:showPercent val="0"/>
+            <c:showBubbleSize val="0"/>
+            <c:showLeaderLines val="0"/>
+            <c:extLst>
+              <c:ext xmlns:c15="http://schemas.microsoft.com/office/drawing/2012/chart" uri="{CE6537A1-D6FC-4f65-9D91-7224C49458BB}">
+                <c15:showLeaderLines val="0"/>
+              </c:ext>
+            </c:extLst>
+          </c:dLbls>
           <c:cat>
-            <c:multiLvlStrRef>
+            <c:strRef>
               <c:f>Sheet1!$A$2:$A$4</c:f>
-              <c:multiLvlStrCache>
+              <c:strCache>
                 <c:ptCount val="3"/>
-                <c:lvl>
-                  <c:pt idx="0">
-                    <c:v>HyperTwin</c:v>
-                  </c:pt>
-                  <c:pt idx="1">
-                    <c:v>7-day mean</c:v>
-                  </c:pt>
-                  <c:pt idx="2">
-                    <c:v>Last reading</c:v>
-                  </c:pt>
-                </c:lvl>
-              </c:multiLvlStrCache>
-            </c:multiLvlStrRef>
+                <c:pt idx="0">
+                  <c:v>HyperTwin</c:v>
+                </c:pt>
+                <c:pt idx="1">
+                  <c:v>7-day mean</c:v>
+                </c:pt>
+                <c:pt idx="2">
+                  <c:v>Last reading</c:v>
+                </c:pt>
+              </c:strCache>
+            </c:strRef>
           </c:cat>
           <c:val>
             <c:numRef>
@@ -1376,47 +1299,34 @@
                 <c:formatCode>General</c:formatCode>
                 <c:ptCount val="3"/>
                 <c:pt idx="0">
-                  <c:v>0.937</c:v>
+                  <c:v>0.93700000000000006</c:v>
                 </c:pt>
                 <c:pt idx="1">
-                  <c:v>0.935</c:v>
+                  <c:v>0.93500000000000005</c:v>
                 </c:pt>
                 <c:pt idx="2">
-                  <c:v>0.904</c:v>
+                  <c:v>0.90400000000000003</c:v>
                 </c:pt>
               </c:numCache>
             </c:numRef>
           </c:val>
+          <c:extLst>
+            <c:ext xmlns:c16="http://schemas.microsoft.com/office/drawing/2014/chart" uri="{C3380CC4-5D6E-409C-BE32-E72D297353CC}">
+              <c16:uniqueId val="{00000006-6BEC-4DA7-9AF1-D0E86A8890E7}"/>
+            </c:ext>
+          </c:extLst>
         </c:ser>
         <c:dLbls>
-          <c:numFmt formatCode="0.000" sourceLinked="0"/>
-          <c:txPr>
-            <a:bodyPr/>
-            <a:lstStyle/>
-            <a:p>
-              <a:pPr>
-                <a:defRPr b="0" i="0" strike="noStrike" sz="1300" u="none">
-                  <a:solidFill>
-                    <a:srgbClr val="1E293B"/>
-                  </a:solidFill>
-                  <a:latin typeface="Arial"/>
-                </a:defRPr>
-              </a:pPr>
-            </a:p>
-          </c:txPr>
           <c:showLegendKey val="0"/>
           <c:showVal val="1"/>
           <c:showCatName val="0"/>
           <c:showSerName val="0"/>
           <c:showPercent val="0"/>
           <c:showBubbleSize val="0"/>
-          <c:showLeaderLines val="0"/>
         </c:dLbls>
         <c:gapWidth val="60"/>
-        <c:overlap val="0"/>
         <c:axId val="2094734554"/>
         <c:axId val="2094734552"/>
-        <c:axId val="2094734556"/>
       </c:barChart>
       <c:catAx>
         <c:axId val="2094734554"/>
@@ -1457,6 +1367,7 @@
         <c:crosses val="autoZero"/>
         <c:auto val="1"/>
         <c:lblAlgn val="ctr"/>
+        <c:lblOffset val="100"/>
         <c:noMultiLvlLbl val="1"/>
       </c:catAx>
       <c:valAx>
@@ -1472,30 +1383,6 @@
         <c:majorTickMark val="out"/>
         <c:minorTickMark val="none"/>
         <c:tickLblPos val="nextTo"/>
-        <c:spPr>
-          <a:ln w="12700" cap="flat">
-            <a:solidFill>
-              <a:srgbClr val="888888"/>
-            </a:solidFill>
-            <a:prstDash val="solid"/>
-            <a:round/>
-          </a:ln>
-        </c:spPr>
-        <c:txPr>
-          <a:bodyPr/>
-          <a:lstStyle/>
-          <a:p>
-            <a:pPr>
-              <a:defRPr sz="1200" b="0" i="0" u="none" strike="noStrike">
-                <a:solidFill>
-                  <a:srgbClr val="000000"/>
-                </a:solidFill>
-                <a:latin typeface="Arial"/>
-              </a:defRPr>
-            </a:pPr>
-            <a:endParaRPr lang="en-US"/>
-          </a:p>
-        </c:txPr>
         <c:crossAx val="2094734554"/>
         <c:crosses val="autoZero"/>
         <c:crossBetween val="between"/>
@@ -1510,6 +1397,7 @@
     </c:plotArea>
     <c:plotVisOnly val="1"/>
     <c:dispBlanksAs val="span"/>
+    <c:showDLblsOverMax val="1"/>
   </c:chart>
   <c:spPr>
     <a:noFill/>
@@ -1525,9 +1413,11 @@
 </file>
 
 <file path=ppt/charts/chart4.xml><?xml version="1.0" encoding="utf-8"?>
-<c:chartSpace xmlns:c="http://schemas.openxmlformats.org/drawingml/2006/chart" xmlns:a="http://schemas.openxmlformats.org/drawingml/2006/main" xmlns:r="http://schemas.openxmlformats.org/officeDocument/2006/relationships">
+<c:chartSpace xmlns:c="http://schemas.openxmlformats.org/drawingml/2006/chart" xmlns:a="http://schemas.openxmlformats.org/drawingml/2006/main" xmlns:r="http://schemas.openxmlformats.org/officeDocument/2006/relationships" xmlns:c16r2="http://schemas.microsoft.com/office/drawing/2015/06/chart">
   <c:date1904 val="0"/>
+  <c:lang val="en-US"/>
   <c:roundedCorners val="1"/>
+  <c:style val="2"/>
   <c:chart>
     <c:autoTitleDeleted val="1"/>
     <c:plotArea>
@@ -1557,40 +1447,15 @@
             <a:effectLst/>
           </c:spPr>
           <c:invertIfNegative val="0"/>
-          <c:dLbls>
-            <c:numFmt formatCode="0.000" sourceLinked="0"/>
-            <c:txPr>
-              <a:bodyPr/>
-              <a:lstStyle/>
-              <a:p>
-                <a:pPr>
-                  <a:defRPr b="0" i="0" strike="noStrike" sz="1300" u="none">
-                    <a:solidFill>
-                      <a:srgbClr val="1E293B"/>
-                    </a:solidFill>
-                    <a:latin typeface="Arial"/>
-                  </a:defRPr>
-                </a:pPr>
-              </a:p>
-            </c:txPr>
-            <c:showLegendKey val="0"/>
-            <c:showVal val="1"/>
-            <c:showCatName val="0"/>
-            <c:showSerName val="0"/>
-            <c:showPercent val="0"/>
-            <c:showBubbleSize val="0"/>
-            <c:showLeaderLines val="0"/>
-          </c:dLbls>
           <c:dPt>
             <c:idx val="0"/>
             <c:invertIfNegative val="0"/>
             <c:bubble3D val="0"/>
-            <c:spPr>
-              <a:solidFill>
-                <a:srgbClr val="0E9F94"/>
-              </a:solidFill>
-              <a:effectLst/>
-            </c:spPr>
+            <c:extLst>
+              <c:ext xmlns:c16="http://schemas.microsoft.com/office/drawing/2014/chart" uri="{C3380CC4-5D6E-409C-BE32-E72D297353CC}">
+                <c16:uniqueId val="{00000001-C0C4-40B0-A3A1-DB81E5CFCF58}"/>
+              </c:ext>
+            </c:extLst>
           </c:dPt>
           <c:dPt>
             <c:idx val="1"/>
@@ -1602,6 +1467,11 @@
               </a:solidFill>
               <a:effectLst/>
             </c:spPr>
+            <c:extLst>
+              <c:ext xmlns:c16="http://schemas.microsoft.com/office/drawing/2014/chart" uri="{C3380CC4-5D6E-409C-BE32-E72D297353CC}">
+                <c16:uniqueId val="{00000003-C0C4-40B0-A3A1-DB81E5CFCF58}"/>
+              </c:ext>
+            </c:extLst>
           </c:dPt>
           <c:dPt>
             <c:idx val="2"/>
@@ -1613,25 +1483,65 @@
               </a:solidFill>
               <a:effectLst/>
             </c:spPr>
+            <c:extLst>
+              <c:ext xmlns:c16="http://schemas.microsoft.com/office/drawing/2014/chart" uri="{C3380CC4-5D6E-409C-BE32-E72D297353CC}">
+                <c16:uniqueId val="{00000005-C0C4-40B0-A3A1-DB81E5CFCF58}"/>
+              </c:ext>
+            </c:extLst>
           </c:dPt>
+          <c:dLbls>
+            <c:numFmt formatCode="0.000" sourceLinked="0"/>
+            <c:spPr>
+              <a:noFill/>
+              <a:ln>
+                <a:noFill/>
+              </a:ln>
+              <a:effectLst/>
+            </c:spPr>
+            <c:txPr>
+              <a:bodyPr/>
+              <a:lstStyle/>
+              <a:p>
+                <a:pPr>
+                  <a:defRPr sz="1300" b="0" i="0" u="none" strike="noStrike">
+                    <a:solidFill>
+                      <a:srgbClr val="1E293B"/>
+                    </a:solidFill>
+                    <a:latin typeface="Arial"/>
+                  </a:defRPr>
+                </a:pPr>
+                <a:endParaRPr lang="en-US"/>
+              </a:p>
+            </c:txPr>
+            <c:showLegendKey val="0"/>
+            <c:showVal val="1"/>
+            <c:showCatName val="0"/>
+            <c:showSerName val="0"/>
+            <c:showPercent val="0"/>
+            <c:showBubbleSize val="0"/>
+            <c:showLeaderLines val="0"/>
+            <c:extLst>
+              <c:ext xmlns:c15="http://schemas.microsoft.com/office/drawing/2012/chart" uri="{CE6537A1-D6FC-4f65-9D91-7224C49458BB}">
+                <c15:showLeaderLines val="0"/>
+              </c:ext>
+            </c:extLst>
+          </c:dLbls>
           <c:cat>
-            <c:multiLvlStrRef>
+            <c:strRef>
               <c:f>Sheet1!$A$2:$A$4</c:f>
-              <c:multiLvlStrCache>
+              <c:strCache>
                 <c:ptCount val="3"/>
-                <c:lvl>
-                  <c:pt idx="0">
-                    <c:v>HyperTwin</c:v>
-                  </c:pt>
-                  <c:pt idx="1">
-                    <c:v>7-day mean</c:v>
-                  </c:pt>
-                  <c:pt idx="2">
-                    <c:v>Last reading</c:v>
-                  </c:pt>
-                </c:lvl>
-              </c:multiLvlStrCache>
-            </c:multiLvlStrRef>
+                <c:pt idx="0">
+                  <c:v>HyperTwin</c:v>
+                </c:pt>
+                <c:pt idx="1">
+                  <c:v>7-day mean</c:v>
+                </c:pt>
+                <c:pt idx="2">
+                  <c:v>Last reading</c:v>
+                </c:pt>
+              </c:strCache>
+            </c:strRef>
           </c:cat>
           <c:val>
             <c:numRef>
@@ -1640,47 +1550,34 @@
                 <c:formatCode>General</c:formatCode>
                 <c:ptCount val="3"/>
                 <c:pt idx="0">
-                  <c:v>0.075</c:v>
+                  <c:v>7.4999999999999997E-2</c:v>
                 </c:pt>
                 <c:pt idx="1">
-                  <c:v>0.076</c:v>
+                  <c:v>7.5999999999999998E-2</c:v>
                 </c:pt>
                 <c:pt idx="2">
-                  <c:v>0.099</c:v>
+                  <c:v>9.9000000000000005E-2</c:v>
                 </c:pt>
               </c:numCache>
             </c:numRef>
           </c:val>
+          <c:extLst>
+            <c:ext xmlns:c16="http://schemas.microsoft.com/office/drawing/2014/chart" uri="{C3380CC4-5D6E-409C-BE32-E72D297353CC}">
+              <c16:uniqueId val="{00000006-C0C4-40B0-A3A1-DB81E5CFCF58}"/>
+            </c:ext>
+          </c:extLst>
         </c:ser>
         <c:dLbls>
-          <c:numFmt formatCode="0.000" sourceLinked="0"/>
-          <c:txPr>
-            <a:bodyPr/>
-            <a:lstStyle/>
-            <a:p>
-              <a:pPr>
-                <a:defRPr b="0" i="0" strike="noStrike" sz="1300" u="none">
-                  <a:solidFill>
-                    <a:srgbClr val="1E293B"/>
-                  </a:solidFill>
-                  <a:latin typeface="Arial"/>
-                </a:defRPr>
-              </a:pPr>
-            </a:p>
-          </c:txPr>
           <c:showLegendKey val="0"/>
           <c:showVal val="1"/>
           <c:showCatName val="0"/>
           <c:showSerName val="0"/>
           <c:showPercent val="0"/>
           <c:showBubbleSize val="0"/>
-          <c:showLeaderLines val="0"/>
         </c:dLbls>
         <c:gapWidth val="60"/>
-        <c:overlap val="0"/>
         <c:axId val="2094734554"/>
         <c:axId val="2094734552"/>
-        <c:axId val="2094734556"/>
       </c:barChart>
       <c:catAx>
         <c:axId val="2094734554"/>
@@ -1721,6 +1618,7 @@
         <c:crosses val="autoZero"/>
         <c:auto val="1"/>
         <c:lblAlgn val="ctr"/>
+        <c:lblOffset val="100"/>
         <c:noMultiLvlLbl val="1"/>
       </c:catAx>
       <c:valAx>
@@ -1736,30 +1634,6 @@
         <c:majorTickMark val="out"/>
         <c:minorTickMark val="none"/>
         <c:tickLblPos val="nextTo"/>
-        <c:spPr>
-          <a:ln w="12700" cap="flat">
-            <a:solidFill>
-              <a:srgbClr val="888888"/>
-            </a:solidFill>
-            <a:prstDash val="solid"/>
-            <a:round/>
-          </a:ln>
-        </c:spPr>
-        <c:txPr>
-          <a:bodyPr/>
-          <a:lstStyle/>
-          <a:p>
-            <a:pPr>
-              <a:defRPr sz="1200" b="0" i="0" u="none" strike="noStrike">
-                <a:solidFill>
-                  <a:srgbClr val="000000"/>
-                </a:solidFill>
-                <a:latin typeface="Arial"/>
-              </a:defRPr>
-            </a:pPr>
-            <a:endParaRPr lang="en-US"/>
-          </a:p>
-        </c:txPr>
         <c:crossAx val="2094734554"/>
         <c:crosses val="autoZero"/>
         <c:crossBetween val="between"/>
@@ -1774,6 +1648,7 @@
     </c:plotArea>
     <c:plotVisOnly val="1"/>
     <c:dispBlanksAs val="span"/>
+    <c:showDLblsOverMax val="1"/>
   </c:chart>
   <c:spPr>
     <a:noFill/>
@@ -1810,234 +1685,10 @@
           <a:chExt cx="0" cy="0"/>
         </a:xfrm>
       </p:grpSpPr>
-      <p:sp>
-        <p:nvSpPr>
-          <p:cNvPr id="2" name="Header Placeholder 1"/>
-          <p:cNvSpPr>
-            <a:spLocks noGrp="1"/>
-          </p:cNvSpPr>
-          <p:nvPr>
-            <p:ph type="hdr" sz="quarter"/>
-          </p:nvPr>
-        </p:nvSpPr>
-        <p:spPr>
-          <a:xfrm>
-            <a:off x="0" y="0"/>
-            <a:ext cx="2971800" cy="458788"/>
-          </a:xfrm>
-          <a:prstGeom prst="rect">
-            <a:avLst/>
-          </a:prstGeom>
-        </p:spPr>
-        <p:txBody>
-          <a:bodyPr vert="horz" lIns="91440" tIns="45720" rIns="91440" bIns="45720" rtlCol="0"/>
-          <a:lstStyle>
-            <a:lvl1pPr algn="l">
-              <a:defRPr sz="1200"/>
-            </a:lvl1pPr>
-          </a:lstStyle>
-          <a:p>
-            <a:endParaRPr lang="en-US"/>
-          </a:p>
-        </p:txBody>
-      </p:sp>
-      <p:sp>
-        <p:nvSpPr>
-          <p:cNvPr id="3" name="Date Placeholder 2"/>
-          <p:cNvSpPr>
-            <a:spLocks noGrp="1"/>
-          </p:cNvSpPr>
-          <p:nvPr>
-            <p:ph type="dt" idx="1"/>
-          </p:nvPr>
-        </p:nvSpPr>
-        <p:spPr>
-          <a:xfrm>
-            <a:off x="3884613" y="0"/>
-            <a:ext cx="2971800" cy="458788"/>
-          </a:xfrm>
-          <a:prstGeom prst="rect">
-            <a:avLst/>
-          </a:prstGeom>
-        </p:spPr>
-        <p:txBody>
-          <a:bodyPr vert="horz" lIns="91440" tIns="45720" rIns="91440" bIns="45720" rtlCol="0"/>
-          <a:lstStyle>
-            <a:lvl1pPr algn="r">
-              <a:defRPr sz="1200"/>
-            </a:lvl1pPr>
-          </a:lstStyle>
-          <a:p>
-            <a:fld id="{5282F153-3F37-0F45-9E97-73ACFA13230C}" type="datetimeFigureOut">
-              <a:rPr lang="en-US"/>
-              <a:t>7/23/19</a:t>
-            </a:fld>
-            <a:endParaRPr lang="en-US"/>
-          </a:p>
-        </p:txBody>
-      </p:sp>
-      <p:sp>
-        <p:nvSpPr>
-          <p:cNvPr id="4" name="Slide Image Placeholder 3"/>
-          <p:cNvSpPr>
-            <a:spLocks noGrp="1" noRot="1" noChangeAspect="1"/>
-          </p:cNvSpPr>
-          <p:nvPr>
-            <p:ph type="sldImg" idx="2"/>
-          </p:nvPr>
-        </p:nvSpPr>
-        <p:spPr>
-          <a:xfrm>
-            <a:off x="685800" y="1143000"/>
-            <a:ext cx="5486400" cy="3086100"/>
-          </a:xfrm>
-          <a:prstGeom prst="rect">
-            <a:avLst/>
-          </a:prstGeom>
-          <a:noFill/>
-          <a:ln w="12700">
-            <a:solidFill>
-              <a:prstClr val="black"/>
-            </a:solidFill>
-          </a:ln>
-        </p:spPr>
-        <p:txBody>
-          <a:bodyPr vert="horz" lIns="91440" tIns="45720" rIns="91440" bIns="45720" rtlCol="0" anchor="ctr"/>
-          <a:lstStyle/>
-          <a:p>
-            <a:endParaRPr lang="en-US"/>
-          </a:p>
-        </p:txBody>
-      </p:sp>
-      <p:sp>
-        <p:nvSpPr>
-          <p:cNvPr id="5" name="Notes Placeholder 4"/>
-          <p:cNvSpPr>
-            <a:spLocks noGrp="1"/>
-          </p:cNvSpPr>
-          <p:nvPr>
-            <p:ph type="body" sz="quarter" idx="3"/>
-          </p:nvPr>
-        </p:nvSpPr>
-        <p:spPr>
-          <a:xfrm>
-            <a:off x="685800" y="4400550"/>
-            <a:ext cx="5486400" cy="3600450"/>
-          </a:xfrm>
-          <a:prstGeom prst="rect">
-            <a:avLst/>
-          </a:prstGeom>
-        </p:spPr>
-        <p:txBody>
-          <a:bodyPr vert="horz" lIns="91440" tIns="45720" rIns="91440" bIns="45720" rtlCol="0"/>
-          <a:lstStyle/>
-          <a:p>
-            <a:pPr lvl="0"/>
-            <a:r>
-              <a:rPr lang="en-US"/>
-              <a:t>Click to edit Master text styles</a:t>
-            </a:r>
-          </a:p>
-          <a:p>
-            <a:pPr lvl="1"/>
-            <a:r>
-              <a:rPr lang="en-US"/>
-              <a:t>Second level</a:t>
-            </a:r>
-          </a:p>
-          <a:p>
-            <a:pPr lvl="2"/>
-            <a:r>
-              <a:rPr lang="en-US"/>
-              <a:t>Third level</a:t>
-            </a:r>
-          </a:p>
-          <a:p>
-            <a:pPr lvl="3"/>
-            <a:r>
-              <a:rPr lang="en-US"/>
-              <a:t>Fourth level</a:t>
-            </a:r>
-          </a:p>
-          <a:p>
-            <a:pPr lvl="4"/>
-            <a:r>
-              <a:rPr lang="en-US"/>
-              <a:t>Fifth level</a:t>
-            </a:r>
-          </a:p>
-        </p:txBody>
-      </p:sp>
-      <p:sp>
-        <p:nvSpPr>
-          <p:cNvPr id="6" name="Footer Placeholder 5"/>
-          <p:cNvSpPr>
-            <a:spLocks noGrp="1"/>
-          </p:cNvSpPr>
-          <p:nvPr>
-            <p:ph type="ftr" sz="quarter" idx="4"/>
-          </p:nvPr>
-        </p:nvSpPr>
-        <p:spPr>
-          <a:xfrm>
-            <a:off x="0" y="8685213"/>
-            <a:ext cx="2971800" cy="458787"/>
-          </a:xfrm>
-          <a:prstGeom prst="rect">
-            <a:avLst/>
-          </a:prstGeom>
-        </p:spPr>
-        <p:txBody>
-          <a:bodyPr vert="horz" lIns="91440" tIns="45720" rIns="91440" bIns="45720" rtlCol="0" anchor="b"/>
-          <a:lstStyle>
-            <a:lvl1pPr algn="l">
-              <a:defRPr sz="1200"/>
-            </a:lvl1pPr>
-          </a:lstStyle>
-          <a:p>
-            <a:endParaRPr lang="en-US"/>
-          </a:p>
-        </p:txBody>
-      </p:sp>
-      <p:sp>
-        <p:nvSpPr>
-          <p:cNvPr id="7" name="Slide Number Placeholder 6"/>
-          <p:cNvSpPr>
-            <a:spLocks noGrp="1"/>
-          </p:cNvSpPr>
-          <p:nvPr>
-            <p:ph type="sldNum" sz="quarter" idx="5"/>
-          </p:nvPr>
-        </p:nvSpPr>
-        <p:spPr>
-          <a:xfrm>
-            <a:off x="3884613" y="8685213"/>
-            <a:ext cx="2971800" cy="458787"/>
-          </a:xfrm>
-          <a:prstGeom prst="rect">
-            <a:avLst/>
-          </a:prstGeom>
-        </p:spPr>
-        <p:txBody>
-          <a:bodyPr vert="horz" lIns="91440" tIns="45720" rIns="91440" bIns="45720" rtlCol="0" anchor="b"/>
-          <a:lstStyle>
-            <a:lvl1pPr algn="r">
-              <a:defRPr sz="1200"/>
-            </a:lvl1pPr>
-          </a:lstStyle>
-          <a:p>
-            <a:fld id="{CE5E9CC1-C706-0F49-92D6-E571CC5EEA8F}" type="slidenum">
-              <a:rPr lang="en-US"/>
-              <a:t>‹#›</a:t>
-            </a:fld>
-            <a:endParaRPr lang="en-US"/>
-          </a:p>
-        </p:txBody>
-      </p:sp>
     </p:spTree>
     <p:extLst>
       <p:ext uri="{BB962C8B-B14F-4D97-AF65-F5344CB8AC3E}">
-        <p14:creationId xmlns:p14="http://schemas.microsoft.com/office/powerpoint/2010/main" val="1024086991"/>
+        <p14:creationId xmlns:p14="http://schemas.microsoft.com/office/powerpoint/2010/main" val="573392073"/>
       </p:ext>
     </p:extLst>
   </p:cSld>
@@ -2185,7 +1836,6 @@
               <a:rPr lang="en-US" dirty="0"/>
               <a:t>Open with the problem, not the tool. HyperTwin is a research prototype on synthetic data.</a:t>
             </a:r>
-            <a:endParaRPr lang="en-US" dirty="0"/>
           </a:p>
         </p:txBody>
       </p:sp>
@@ -2273,7 +1923,6 @@
               <a:rPr lang="en-US" dirty="0"/>
               <a:t>Only what is implemented and tested is listed here.</a:t>
             </a:r>
-            <a:endParaRPr lang="en-US" dirty="0"/>
           </a:p>
         </p:txBody>
       </p:sp>
@@ -2361,7 +2010,6 @@
               <a:rPr lang="en-US" dirty="0"/>
               <a:t>State all of this out loud in the video.</a:t>
             </a:r>
-            <a:endParaRPr lang="en-US" dirty="0"/>
           </a:p>
         </p:txBody>
       </p:sp>
@@ -2445,10 +2093,6 @@
           <a:bodyPr/>
           <a:lstStyle/>
           <a:p>
-            <a:r>
-              <a:rPr lang="en-US" dirty="0"/>
-              <a:t/>
-            </a:r>
             <a:endParaRPr lang="en-US" dirty="0"/>
           </a:p>
         </p:txBody>
@@ -2537,7 +2181,6 @@
               <a:rPr lang="en-US" dirty="0"/>
               <a:t>Guidelines endorse home BP and cite 135/85 for multi-day averages. The chart is a synthetic patient, not real data.</a:t>
             </a:r>
-            <a:endParaRPr lang="en-US" dirty="0"/>
           </a:p>
         </p:txBody>
       </p:sp>
@@ -2625,7 +2268,6 @@
               <a:rPr lang="en-US" dirty="0"/>
               <a:t>A static dashboard shows readings. A twin keeps a state that changes when new data arrives.</a:t>
             </a:r>
-            <a:endParaRPr lang="en-US" dirty="0"/>
           </a:p>
         </p:txBody>
       </p:sp>
@@ -2713,7 +2355,6 @@
               <a:rPr lang="en-US" dirty="0"/>
               <a:t>Read the sentence slowly. Everything on this slide exists in the code.</a:t>
             </a:r>
-            <a:endParaRPr lang="en-US" dirty="0"/>
           </a:p>
         </p:txBody>
       </p:sp>
@@ -2801,7 +2442,6 @@
               <a:rPr lang="en-US" dirty="0"/>
               <a:t>Walk left to right. Missing and implausible readings do not move the state; uncertainty grows instead.</a:t>
             </a:r>
-            <a:endParaRPr lang="en-US" dirty="0"/>
           </a:p>
         </p:txBody>
       </p:sp>
@@ -2889,7 +2529,6 @@
               <a:rPr lang="en-US" dirty="0"/>
               <a:t>This is the real Streamlit app. Controls: patient, replay slider, target, add observation.</a:t>
             </a:r>
-            <a:endParaRPr lang="en-US" dirty="0"/>
           </a:p>
         </p:txBody>
       </p:sp>
@@ -2977,7 +2616,6 @@
               <a:rPr lang="en-US" dirty="0"/>
               <a:t>Verified in the app: 175/95 gives 6% to 53%. The added reading moves forecast and risk; it is not drawn as a point on the chart.</a:t>
             </a:r>
-            <a:endParaRPr lang="en-US" dirty="0"/>
           </a:p>
         </p:txBody>
       </p:sp>
@@ -3065,7 +2703,6 @@
               <a:rPr lang="en-US" dirty="0"/>
               <a:t>The sliders are planned sleep and planned steps for the next day.</a:t>
             </a:r>
-            <a:endParaRPr lang="en-US" dirty="0"/>
           </a:p>
         </p:txBody>
       </p:sp>
@@ -3153,7 +2790,6 @@
               <a:rPr lang="en-US" dirty="0"/>
               <a:t>Be honest: the 7-day mean is nearly as good. Results show agreement with our own generator, not clinical validity.</a:t>
             </a:r>
-            <a:endParaRPr lang="en-US" dirty="0"/>
           </a:p>
         </p:txBody>
       </p:sp>
@@ -3231,6 +2867,7 @@
         <a:solidFill>
           <a:srgbClr val="0B1F3A"/>
         </a:solidFill>
+        <a:effectLst/>
       </p:bgPr>
     </p:bg>
     <p:spTree>
@@ -3267,7 +2904,7 @@
           </a:prstGeom>
           <a:extLst>
             <a:ext uri="{C572A759-6A51-4108-AA02-DFA0A04FC94B}">
-              <ma14:wrappingTextBoxFlag xmlns:ma14="http://schemas.microsoft.com/office/mac/drawingml/2011/main" val="0"/>
+              <ma14:wrappingTextBoxFlag xmlns:ma14="http://schemas.microsoft.com/office/mac/drawingml/2011/main" xmlns="" val="0"/>
             </a:ext>
           </a:extLst>
         </p:spPr>
@@ -3288,8 +2925,8 @@
           <a:p>
             <a:pPr algn="r"/>
             <a:fld id="{F7021451-1387-4CA6-816F-3879F97B5CBC}" type="slidenum">
-              <a:rPr b="0" lang="en-US"/>
-              <a:t>1002</a:t>
+              <a:rPr lang="en-US" b="0"/>
+              <a:t>‹#›</a:t>
             </a:fld>
             <a:endParaRPr lang="en-US"/>
           </a:p>
@@ -3311,6 +2948,7 @@
         <a:solidFill>
           <a:srgbClr val="FFFFFF"/>
         </a:solidFill>
+        <a:effectLst/>
       </p:bgPr>
     </p:bg>
     <p:spTree>
@@ -3347,7 +2985,7 @@
           </a:prstGeom>
           <a:extLst>
             <a:ext uri="{C572A759-6A51-4108-AA02-DFA0A04FC94B}">
-              <ma14:wrappingTextBoxFlag xmlns:ma14="http://schemas.microsoft.com/office/mac/drawingml/2011/main" val="0"/>
+              <ma14:wrappingTextBoxFlag xmlns:ma14="http://schemas.microsoft.com/office/mac/drawingml/2011/main" xmlns="" val="0"/>
             </a:ext>
           </a:extLst>
         </p:spPr>
@@ -3368,8 +3006,8 @@
           <a:p>
             <a:pPr algn="r"/>
             <a:fld id="{F7021451-1387-4CA6-816F-3879F97B5CBC}" type="slidenum">
-              <a:rPr b="0" lang="en-US"/>
-              <a:t>1003</a:t>
+              <a:rPr lang="en-US" b="0"/>
+              <a:t>‹#›</a:t>
             </a:fld>
             <a:endParaRPr lang="en-US"/>
           </a:p>
@@ -3386,6 +3024,11 @@
 <file path=ppt/slideMasters/slideMaster1.xml><?xml version="1.0" encoding="utf-8"?>
 <p:sldMaster xmlns:a="http://schemas.openxmlformats.org/drawingml/2006/main" xmlns:r="http://schemas.openxmlformats.org/officeDocument/2006/relationships" xmlns:p="http://schemas.openxmlformats.org/presentationml/2006/main">
   <p:cSld>
+    <p:bg>
+      <p:bgRef idx="1001">
+        <a:schemeClr val="bg1"/>
+      </p:bgRef>
+    </p:bg>
     <p:spTree>
       <p:nvGrpSpPr>
         <p:cNvPr id="1" name=""/>
@@ -3420,7 +3063,7 @@
           </a:prstGeom>
           <a:extLst>
             <a:ext uri="{C572A759-6A51-4108-AA02-DFA0A04FC94B}">
-              <ma14:wrappingTextBoxFlag xmlns:ma14="http://schemas.microsoft.com/office/mac/drawingml/2011/main" val="0"/>
+              <ma14:wrappingTextBoxFlag xmlns:ma14="http://schemas.microsoft.com/office/mac/drawingml/2011/main" xmlns="" val="0"/>
             </a:ext>
           </a:extLst>
         </p:spPr>
@@ -3441,8 +3084,8 @@
           <a:p>
             <a:pPr algn="r"/>
             <a:fld id="{F7021451-1387-4CA6-816F-3879F97B5CBC}" type="slidenum">
-              <a:rPr b="0" lang="en-US"/>
-              <a:t>null</a:t>
+              <a:rPr lang="en-US" b="0"/>
+              <a:t>‹#›</a:t>
             </a:fld>
             <a:endParaRPr lang="en-US"/>
           </a:p>
@@ -3773,11 +3416,11 @@
           <a:bodyPr wrap="square" lIns="0" tIns="0" rIns="0" bIns="0" rtlCol="0" anchor="t"/>
           <a:lstStyle/>
           <a:p>
-            <a:pPr indent="0" marL="0">
-              <a:buNone/>
-            </a:pPr>
-            <a:r>
-              <a:rPr lang="en-US" sz="1400" b="1" spc="300" kern="0" dirty="0">
+            <a:pPr marL="0" indent="0">
+              <a:buNone/>
+            </a:pPr>
+            <a:r>
+              <a:rPr lang="en-US" sz="1400" b="1" kern="0" spc="300" dirty="0">
                 <a:solidFill>
                   <a:srgbClr val="5EEAD4"/>
                 </a:solidFill>
@@ -3812,7 +3455,7 @@
           <a:bodyPr wrap="square" lIns="0" tIns="0" rIns="0" bIns="0" rtlCol="0" anchor="t"/>
           <a:lstStyle/>
           <a:p>
-            <a:pPr indent="0" marL="0">
+            <a:pPr marL="0" indent="0">
               <a:buNone/>
             </a:pPr>
             <a:r>
@@ -3851,7 +3494,7 @@
           <a:bodyPr wrap="square" lIns="0" tIns="0" rIns="0" bIns="0" rtlCol="0" anchor="t"/>
           <a:lstStyle/>
           <a:p>
-            <a:pPr indent="0" marL="0">
+            <a:pPr marL="0" indent="0">
               <a:buNone/>
             </a:pPr>
             <a:r>
@@ -3890,7 +3533,7 @@
           <a:bodyPr wrap="square" lIns="0" tIns="0" rIns="0" bIns="0" rtlCol="0" anchor="t"/>
           <a:lstStyle/>
           <a:p>
-            <a:pPr indent="0" marL="0">
+            <a:pPr marL="0" indent="0">
               <a:buNone/>
             </a:pPr>
             <a:r>
@@ -3929,21 +3572,17 @@
           <a:bodyPr wrap="square" lIns="0" tIns="0" rIns="0" bIns="0" rtlCol="0" anchor="t"/>
           <a:lstStyle/>
           <a:p>
-            <a:pPr indent="0" marL="0">
+            <a:pPr marL="0" indent="0">
               <a:buNone/>
             </a:pPr>
             <a:r>
               <a:rPr lang="en-US" sz="1600" dirty="0">
                 <a:solidFill>
-                  <a:srgbClr val="8FA6C0"/>
-                </a:solidFill>
-                <a:latin typeface="Arial" pitchFamily="34" charset="0"/>
-                <a:ea typeface="Arial" pitchFamily="34" charset="-122"/>
-                <a:cs typeface="Arial" pitchFamily="34" charset="-120"/>
-              </a:rPr>
-              <a:t>[Team name]  ·  [College / incubator]  ·  to be filled with verified details</a:t>
-            </a:r>
-            <a:endParaRPr lang="en-US" sz="1600" dirty="0"/>
+                  <a:schemeClr val="bg1"/>
+                </a:solidFill>
+              </a:rPr>
+              <a:t>Arshin Kazi (arshin.kazi20) | Mody University of Science and Technology</a:t>
+            </a:r>
           </a:p>
         </p:txBody>
       </p:sp>
@@ -3967,7 +3606,7 @@
           </a:prstGeom>
           <a:extLst>
             <a:ext uri="{C572A759-6A51-4108-AA02-DFA0A04FC94B}">
-              <ma14:wrappingTextBoxFlag xmlns:ma14="http://schemas.microsoft.com/office/mac/drawingml/2011/main" val="0"/>
+              <ma14:wrappingTextBoxFlag xmlns:ma14="http://schemas.microsoft.com/office/mac/drawingml/2011/main" xmlns="" val="0"/>
             </a:ext>
           </a:extLst>
         </p:spPr>
@@ -3988,7 +3627,7 @@
           <a:p>
             <a:pPr algn="r"/>
             <a:fld id="{F7021451-1387-4CA6-816F-3879F97B5CBC}" type="slidenum">
-              <a:rPr b="0" lang="en-US"/>
+              <a:rPr lang="en-US" b="0"/>
               <a:t>1</a:t>
             </a:fld>
             <a:endParaRPr lang="en-US"/>
@@ -4041,7 +3680,7 @@
           <a:bodyPr wrap="square" lIns="0" tIns="0" rIns="0" bIns="0" rtlCol="0" anchor="ctr"/>
           <a:lstStyle/>
           <a:p>
-            <a:pPr indent="0" marL="0">
+            <a:pPr marL="0" indent="0">
               <a:buNone/>
             </a:pPr>
             <a:r>
@@ -4157,7 +3796,7 @@
           <a:bodyPr wrap="square" lIns="0" tIns="0" rIns="0" bIns="0" rtlCol="0" anchor="t"/>
           <a:lstStyle/>
           <a:p>
-            <a:pPr indent="0" marL="0">
+            <a:pPr marL="0" indent="0">
               <a:buNone/>
             </a:pPr>
             <a:r>
@@ -4196,7 +3835,7 @@
           <a:bodyPr wrap="square" lIns="0" tIns="0" rIns="0" bIns="0" rtlCol="0" anchor="t"/>
           <a:lstStyle/>
           <a:p>
-            <a:pPr indent="0" marL="0">
+            <a:pPr marL="0" indent="0">
               <a:buNone/>
             </a:pPr>
             <a:r>
@@ -4235,7 +3874,7 @@
           <a:bodyPr wrap="square" lIns="0" tIns="0" rIns="0" bIns="0" rtlCol="0" anchor="t"/>
           <a:lstStyle/>
           <a:p>
-            <a:pPr indent="0" marL="0">
+            <a:pPr marL="0" indent="0">
               <a:buNone/>
             </a:pPr>
             <a:r>
@@ -4326,7 +3965,7 @@
           <a:bodyPr wrap="square" lIns="0" tIns="0" rIns="0" bIns="0" rtlCol="0" anchor="t"/>
           <a:lstStyle/>
           <a:p>
-            <a:pPr indent="0" marL="0">
+            <a:pPr marL="0" indent="0">
               <a:buNone/>
             </a:pPr>
             <a:r>
@@ -4365,7 +4004,7 @@
           <a:bodyPr wrap="square" lIns="0" tIns="0" rIns="0" bIns="0" rtlCol="0" anchor="t"/>
           <a:lstStyle/>
           <a:p>
-            <a:pPr indent="0" marL="0">
+            <a:pPr marL="0" indent="0">
               <a:buNone/>
             </a:pPr>
             <a:r>
@@ -4404,7 +4043,7 @@
           <a:bodyPr wrap="square" lIns="0" tIns="0" rIns="0" bIns="0" rtlCol="0" anchor="t"/>
           <a:lstStyle/>
           <a:p>
-            <a:pPr indent="0" marL="0">
+            <a:pPr marL="0" indent="0">
               <a:buNone/>
             </a:pPr>
             <a:r>
@@ -4495,7 +4134,7 @@
           <a:bodyPr wrap="square" lIns="0" tIns="0" rIns="0" bIns="0" rtlCol="0" anchor="t"/>
           <a:lstStyle/>
           <a:p>
-            <a:pPr indent="0" marL="0">
+            <a:pPr marL="0" indent="0">
               <a:buNone/>
             </a:pPr>
             <a:r>
@@ -4534,7 +4173,7 @@
           <a:bodyPr wrap="square" lIns="0" tIns="0" rIns="0" bIns="0" rtlCol="0" anchor="t"/>
           <a:lstStyle/>
           <a:p>
-            <a:pPr indent="0" marL="0">
+            <a:pPr marL="0" indent="0">
               <a:buNone/>
             </a:pPr>
             <a:r>
@@ -4573,7 +4212,7 @@
           <a:bodyPr wrap="square" lIns="0" tIns="0" rIns="0" bIns="0" rtlCol="0" anchor="t"/>
           <a:lstStyle/>
           <a:p>
-            <a:pPr indent="0" marL="0">
+            <a:pPr marL="0" indent="0">
               <a:buNone/>
             </a:pPr>
             <a:r>
@@ -4664,7 +4303,7 @@
           <a:bodyPr wrap="square" lIns="0" tIns="0" rIns="0" bIns="0" rtlCol="0" anchor="t"/>
           <a:lstStyle/>
           <a:p>
-            <a:pPr indent="0" marL="0">
+            <a:pPr marL="0" indent="0">
               <a:buNone/>
             </a:pPr>
             <a:r>
@@ -4703,7 +4342,7 @@
           <a:bodyPr wrap="square" lIns="0" tIns="0" rIns="0" bIns="0" rtlCol="0" anchor="t"/>
           <a:lstStyle/>
           <a:p>
-            <a:pPr indent="0" marL="0">
+            <a:pPr marL="0" indent="0">
               <a:buNone/>
             </a:pPr>
             <a:r>
@@ -4742,7 +4381,7 @@
           <a:bodyPr wrap="square" lIns="0" tIns="0" rIns="0" bIns="0" rtlCol="0" anchor="t"/>
           <a:lstStyle/>
           <a:p>
-            <a:pPr indent="0" marL="0">
+            <a:pPr marL="0" indent="0">
               <a:buNone/>
             </a:pPr>
             <a:r>
@@ -4833,7 +4472,7 @@
           <a:bodyPr wrap="square" lIns="0" tIns="0" rIns="0" bIns="0" rtlCol="0" anchor="t"/>
           <a:lstStyle/>
           <a:p>
-            <a:pPr indent="0" marL="0">
+            <a:pPr marL="0" indent="0">
               <a:buNone/>
             </a:pPr>
             <a:r>
@@ -4872,7 +4511,7 @@
           <a:bodyPr wrap="square" lIns="0" tIns="0" rIns="0" bIns="0" rtlCol="0" anchor="t"/>
           <a:lstStyle/>
           <a:p>
-            <a:pPr indent="0" marL="0">
+            <a:pPr marL="0" indent="0">
               <a:buNone/>
             </a:pPr>
             <a:r>
@@ -4911,7 +4550,7 @@
           <a:bodyPr wrap="square" lIns="0" tIns="0" rIns="0" bIns="0" rtlCol="0" anchor="t"/>
           <a:lstStyle/>
           <a:p>
-            <a:pPr indent="0" marL="0">
+            <a:pPr marL="0" indent="0">
               <a:buNone/>
             </a:pPr>
             <a:r>
@@ -4950,7 +4589,7 @@
           <a:bodyPr wrap="square" lIns="0" tIns="0" rIns="0" bIns="0" rtlCol="0" anchor="t"/>
           <a:lstStyle/>
           <a:p>
-            <a:pPr indent="0" marL="0">
+            <a:pPr marL="0" indent="0">
               <a:buNone/>
             </a:pPr>
             <a:r>
@@ -4970,7 +4609,7 @@
       </p:sp>
       <p:sp>
         <p:nvSpPr>
-          <p:cNvPr id="25" name="Slide Number Placeholder 0"/>
+          <p:cNvPr id="30" name="Slide Number Placeholder 0"/>
           <p:cNvSpPr>
             <a:spLocks noGrp="1"/>
           </p:cNvSpPr>
@@ -4988,7 +4627,7 @@
           </a:prstGeom>
           <a:extLst>
             <a:ext uri="{C572A759-6A51-4108-AA02-DFA0A04FC94B}">
-              <ma14:wrappingTextBoxFlag xmlns:ma14="http://schemas.microsoft.com/office/mac/drawingml/2011/main" val="0"/>
+              <ma14:wrappingTextBoxFlag xmlns:ma14="http://schemas.microsoft.com/office/mac/drawingml/2011/main" xmlns="" val="0"/>
             </a:ext>
           </a:extLst>
         </p:spPr>
@@ -5009,7 +4648,7 @@
           <a:p>
             <a:pPr algn="r"/>
             <a:fld id="{F7021451-1387-4CA6-816F-3879F97B5CBC}" type="slidenum">
-              <a:rPr b="0" lang="en-US"/>
+              <a:rPr lang="en-US" b="0"/>
               <a:t>10</a:t>
             </a:fld>
             <a:endParaRPr lang="en-US"/>
@@ -5062,7 +4701,7 @@
           <a:bodyPr wrap="square" lIns="0" tIns="0" rIns="0" bIns="0" rtlCol="0" anchor="ctr"/>
           <a:lstStyle/>
           <a:p>
-            <a:pPr indent="0" marL="0">
+            <a:pPr marL="0" indent="0">
               <a:buNone/>
             </a:pPr>
             <a:r>
@@ -5178,7 +4817,7 @@
           <a:bodyPr wrap="square" lIns="0" tIns="0" rIns="0" bIns="0" rtlCol="0" anchor="t"/>
           <a:lstStyle/>
           <a:p>
-            <a:pPr indent="0" marL="0">
+            <a:pPr marL="0" indent="0">
               <a:buNone/>
             </a:pPr>
             <a:r>
@@ -5217,7 +4856,7 @@
           <a:bodyPr wrap="square" lIns="0" tIns="0" rIns="0" bIns="0" rtlCol="0" anchor="t"/>
           <a:lstStyle/>
           <a:p>
-            <a:pPr indent="0" marL="0">
+            <a:pPr marL="0" indent="0">
               <a:buNone/>
             </a:pPr>
             <a:r>
@@ -5308,7 +4947,7 @@
           <a:bodyPr wrap="square" lIns="0" tIns="0" rIns="0" bIns="0" rtlCol="0" anchor="t"/>
           <a:lstStyle/>
           <a:p>
-            <a:pPr indent="0" marL="0">
+            <a:pPr marL="0" indent="0">
               <a:buNone/>
             </a:pPr>
             <a:r>
@@ -5347,7 +4986,7 @@
           <a:bodyPr wrap="square" lIns="0" tIns="0" rIns="0" bIns="0" rtlCol="0" anchor="t"/>
           <a:lstStyle/>
           <a:p>
-            <a:pPr indent="0" marL="0">
+            <a:pPr marL="0" indent="0">
               <a:buNone/>
             </a:pPr>
             <a:r>
@@ -5438,7 +5077,7 @@
           <a:bodyPr wrap="square" lIns="0" tIns="0" rIns="0" bIns="0" rtlCol="0" anchor="t"/>
           <a:lstStyle/>
           <a:p>
-            <a:pPr indent="0" marL="0">
+            <a:pPr marL="0" indent="0">
               <a:buNone/>
             </a:pPr>
             <a:r>
@@ -5477,7 +5116,7 @@
           <a:bodyPr wrap="square" lIns="0" tIns="0" rIns="0" bIns="0" rtlCol="0" anchor="t"/>
           <a:lstStyle/>
           <a:p>
-            <a:pPr indent="0" marL="0">
+            <a:pPr marL="0" indent="0">
               <a:buNone/>
             </a:pPr>
             <a:r>
@@ -5568,7 +5207,7 @@
           <a:bodyPr wrap="square" lIns="0" tIns="0" rIns="0" bIns="0" rtlCol="0" anchor="t"/>
           <a:lstStyle/>
           <a:p>
-            <a:pPr indent="0" marL="0">
+            <a:pPr marL="0" indent="0">
               <a:buNone/>
             </a:pPr>
             <a:r>
@@ -5607,7 +5246,7 @@
           <a:bodyPr wrap="square" lIns="0" tIns="0" rIns="0" bIns="0" rtlCol="0" anchor="t"/>
           <a:lstStyle/>
           <a:p>
-            <a:pPr indent="0" marL="0">
+            <a:pPr marL="0" indent="0">
               <a:buNone/>
             </a:pPr>
             <a:r>
@@ -5698,7 +5337,7 @@
           <a:bodyPr wrap="square" lIns="0" tIns="0" rIns="0" bIns="0" rtlCol="0" anchor="t"/>
           <a:lstStyle/>
           <a:p>
-            <a:pPr indent="0" marL="0">
+            <a:pPr marL="0" indent="0">
               <a:buNone/>
             </a:pPr>
             <a:r>
@@ -5737,7 +5376,7 @@
           <a:bodyPr wrap="square" lIns="0" tIns="0" rIns="0" bIns="0" rtlCol="0" anchor="t"/>
           <a:lstStyle/>
           <a:p>
-            <a:pPr indent="0" marL="0">
+            <a:pPr marL="0" indent="0">
               <a:buNone/>
             </a:pPr>
             <a:r>
@@ -5828,7 +5467,7 @@
           <a:bodyPr wrap="square" lIns="0" tIns="0" rIns="0" bIns="0" rtlCol="0" anchor="t"/>
           <a:lstStyle/>
           <a:p>
-            <a:pPr indent="0" marL="0">
+            <a:pPr marL="0" indent="0">
               <a:buNone/>
             </a:pPr>
             <a:r>
@@ -5867,7 +5506,7 @@
           <a:bodyPr wrap="square" lIns="0" tIns="0" rIns="0" bIns="0" rtlCol="0" anchor="t"/>
           <a:lstStyle/>
           <a:p>
-            <a:pPr indent="0" marL="0">
+            <a:pPr marL="0" indent="0">
               <a:buNone/>
             </a:pPr>
             <a:r>
@@ -5887,7 +5526,7 @@
       </p:sp>
       <p:sp>
         <p:nvSpPr>
-          <p:cNvPr id="25" name="Slide Number Placeholder 0"/>
+          <p:cNvPr id="28" name="Slide Number Placeholder 0"/>
           <p:cNvSpPr>
             <a:spLocks noGrp="1"/>
           </p:cNvSpPr>
@@ -5905,7 +5544,7 @@
           </a:prstGeom>
           <a:extLst>
             <a:ext uri="{C572A759-6A51-4108-AA02-DFA0A04FC94B}">
-              <ma14:wrappingTextBoxFlag xmlns:ma14="http://schemas.microsoft.com/office/mac/drawingml/2011/main" val="0"/>
+              <ma14:wrappingTextBoxFlag xmlns:ma14="http://schemas.microsoft.com/office/mac/drawingml/2011/main" xmlns="" val="0"/>
             </a:ext>
           </a:extLst>
         </p:spPr>
@@ -5926,7 +5565,7 @@
           <a:p>
             <a:pPr algn="r"/>
             <a:fld id="{F7021451-1387-4CA6-816F-3879F97B5CBC}" type="slidenum">
-              <a:rPr b="0" lang="en-US"/>
+              <a:rPr lang="en-US" b="0"/>
               <a:t>11</a:t>
             </a:fld>
             <a:endParaRPr lang="en-US"/>
@@ -5979,7 +5618,7 @@
           <a:bodyPr wrap="square" lIns="0" tIns="0" rIns="0" bIns="0" rtlCol="0" anchor="ctr"/>
           <a:lstStyle/>
           <a:p>
-            <a:pPr indent="0" marL="0">
+            <a:pPr marL="0" indent="0">
               <a:buNone/>
             </a:pPr>
             <a:r>
@@ -6043,7 +5682,7 @@
           <a:bodyPr wrap="square" lIns="0" tIns="0" rIns="0" bIns="0" rtlCol="0" anchor="t"/>
           <a:lstStyle/>
           <a:p>
-            <a:pPr indent="0" marL="0">
+            <a:pPr marL="0" indent="0">
               <a:buNone/>
             </a:pPr>
             <a:r>
@@ -6082,7 +5721,7 @@
           <a:bodyPr wrap="square" lIns="0" tIns="0" rIns="0" bIns="0" rtlCol="0" anchor="t"/>
           <a:lstStyle/>
           <a:p>
-            <a:pPr indent="0" marL="0">
+            <a:pPr marL="0" indent="0">
               <a:buNone/>
             </a:pPr>
             <a:r>
@@ -6146,7 +5785,7 @@
           <a:bodyPr wrap="square" lIns="0" tIns="0" rIns="0" bIns="0" rtlCol="0" anchor="ctr"/>
           <a:lstStyle/>
           <a:p>
-            <a:pPr algn="ctr" indent="0" marL="0">
+            <a:pPr marL="0" indent="0" algn="ctr">
               <a:buNone/>
             </a:pPr>
             <a:r>
@@ -6185,7 +5824,7 @@
           <a:bodyPr wrap="square" lIns="0" tIns="0" rIns="0" bIns="0" rtlCol="0" anchor="ctr"/>
           <a:lstStyle/>
           <a:p>
-            <a:pPr indent="0" marL="0">
+            <a:pPr marL="0" indent="0">
               <a:buNone/>
             </a:pPr>
             <a:r>
@@ -6249,7 +5888,7 @@
           <a:bodyPr wrap="square" lIns="0" tIns="0" rIns="0" bIns="0" rtlCol="0" anchor="ctr"/>
           <a:lstStyle/>
           <a:p>
-            <a:pPr algn="ctr" indent="0" marL="0">
+            <a:pPr marL="0" indent="0" algn="ctr">
               <a:buNone/>
             </a:pPr>
             <a:r>
@@ -6288,7 +5927,7 @@
           <a:bodyPr wrap="square" lIns="0" tIns="0" rIns="0" bIns="0" rtlCol="0" anchor="ctr"/>
           <a:lstStyle/>
           <a:p>
-            <a:pPr indent="0" marL="0">
+            <a:pPr marL="0" indent="0">
               <a:buNone/>
             </a:pPr>
             <a:r>
@@ -6352,7 +5991,7 @@
           <a:bodyPr wrap="square" lIns="0" tIns="0" rIns="0" bIns="0" rtlCol="0" anchor="ctr"/>
           <a:lstStyle/>
           <a:p>
-            <a:pPr algn="ctr" indent="0" marL="0">
+            <a:pPr marL="0" indent="0" algn="ctr">
               <a:buNone/>
             </a:pPr>
             <a:r>
@@ -6391,7 +6030,7 @@
           <a:bodyPr wrap="square" lIns="0" tIns="0" rIns="0" bIns="0" rtlCol="0" anchor="ctr"/>
           <a:lstStyle/>
           <a:p>
-            <a:pPr indent="0" marL="0">
+            <a:pPr marL="0" indent="0">
               <a:buNone/>
             </a:pPr>
             <a:r>
@@ -6455,7 +6094,7 @@
           <a:bodyPr wrap="square" lIns="0" tIns="0" rIns="0" bIns="0" rtlCol="0" anchor="ctr"/>
           <a:lstStyle/>
           <a:p>
-            <a:pPr algn="ctr" indent="0" marL="0">
+            <a:pPr marL="0" indent="0" algn="ctr">
               <a:buNone/>
             </a:pPr>
             <a:r>
@@ -6494,7 +6133,7 @@
           <a:bodyPr wrap="square" lIns="0" tIns="0" rIns="0" bIns="0" rtlCol="0" anchor="ctr"/>
           <a:lstStyle/>
           <a:p>
-            <a:pPr indent="0" marL="0">
+            <a:pPr marL="0" indent="0">
               <a:buNone/>
             </a:pPr>
             <a:r>
@@ -6560,7 +6199,7 @@
           <a:bodyPr wrap="square" lIns="0" tIns="0" rIns="0" bIns="0" rtlCol="0" anchor="t"/>
           <a:lstStyle/>
           <a:p>
-            <a:pPr indent="0" marL="0">
+            <a:pPr marL="0" indent="0">
               <a:buNone/>
             </a:pPr>
             <a:r>
@@ -6599,7 +6238,7 @@
           <a:bodyPr wrap="square" lIns="0" tIns="0" rIns="0" bIns="0" rtlCol="0" anchor="t"/>
           <a:lstStyle/>
           <a:p>
-            <a:pPr indent="0" marL="0">
+            <a:pPr marL="0" indent="0">
               <a:buNone/>
             </a:pPr>
             <a:r>
@@ -6611,99 +6250,51 @@
                 <a:ea typeface="Arial" pitchFamily="34" charset="-122"/>
                 <a:cs typeface="Arial" pitchFamily="34" charset="-120"/>
               </a:rPr>
-              <a:t>[Team name]</a:t>
-            </a:r>
+              <a:t>arshin.kazi20</a:t>
+            </a:r>
+          </a:p>
+          <a:p>
+            <a:pPr marL="0" indent="0">
+              <a:buNone/>
+            </a:pPr>
+            <a:r>
+              <a:rPr lang="en-US" sz="1500" dirty="0">
+                <a:solidFill>
+                  <a:srgbClr val="64748B"/>
+                </a:solidFill>
+                <a:latin typeface="Arial" pitchFamily="34" charset="0"/>
+                <a:ea typeface="Arial" pitchFamily="34" charset="-122"/>
+                <a:cs typeface="Arial" pitchFamily="34" charset="-120"/>
+              </a:rPr>
+              <a:t>Arshin Kazi</a:t>
+            </a:r>
+          </a:p>
+          <a:p>
+            <a:pPr marL="0" indent="0">
+              <a:buNone/>
+            </a:pPr>
+            <a:r>
+              <a:rPr lang="en-US" sz="1500" dirty="0">
+                <a:solidFill>
+                  <a:srgbClr val="64748B"/>
+                </a:solidFill>
+                <a:latin typeface="Arial" pitchFamily="34" charset="0"/>
+                <a:cs typeface="Arial" pitchFamily="34" charset="-120"/>
+              </a:rPr>
+              <a:t>Mody University of Science and Technology</a:t>
+            </a:r>
+          </a:p>
+          <a:p>
+            <a:r>
+              <a:rPr lang="en-US" sz="1500" dirty="0"/>
+              <a:t>https://github.com/arshinkazi/HyperTwin</a:t>
+            </a:r>
+          </a:p>
+          <a:p>
+            <a:pPr marL="0" indent="0">
+              <a:buNone/>
+            </a:pPr>
             <a:endParaRPr lang="en-US" sz="1500" dirty="0"/>
-          </a:p>
-          <a:p>
-            <a:pPr indent="0" marL="0">
-              <a:buNone/>
-            </a:pPr>
-            <a:r>
-              <a:rPr lang="en-US" sz="1500" dirty="0">
-                <a:solidFill>
-                  <a:srgbClr val="64748B"/>
-                </a:solidFill>
-                <a:latin typeface="Arial" pitchFamily="34" charset="0"/>
-                <a:ea typeface="Arial" pitchFamily="34" charset="-122"/>
-                <a:cs typeface="Arial" pitchFamily="34" charset="-120"/>
-              </a:rPr>
-              <a:t>[Member names]</a:t>
-            </a:r>
-            <a:endParaRPr lang="en-US" sz="1500" dirty="0"/>
-          </a:p>
-          <a:p>
-            <a:pPr indent="0" marL="0">
-              <a:buNone/>
-            </a:pPr>
-            <a:r>
-              <a:rPr lang="en-US" sz="1500" dirty="0">
-                <a:solidFill>
-                  <a:srgbClr val="64748B"/>
-                </a:solidFill>
-                <a:latin typeface="Arial" pitchFamily="34" charset="0"/>
-                <a:ea typeface="Arial" pitchFamily="34" charset="-122"/>
-                <a:cs typeface="Arial" pitchFamily="34" charset="-120"/>
-              </a:rPr>
-              <a:t>[College / incubator]</a:t>
-            </a:r>
-            <a:endParaRPr lang="en-US" sz="1500" dirty="0"/>
-          </a:p>
-          <a:p>
-            <a:pPr indent="0" marL="0">
-              <a:buNone/>
-            </a:pPr>
-            <a:r>
-              <a:rPr lang="en-US" sz="1500" dirty="0">
-                <a:solidFill>
-                  <a:srgbClr val="64748B"/>
-                </a:solidFill>
-                <a:latin typeface="Arial" pitchFamily="34" charset="0"/>
-                <a:ea typeface="Arial" pitchFamily="34" charset="-122"/>
-                <a:cs typeface="Arial" pitchFamily="34" charset="-120"/>
-              </a:rPr>
-              <a:t>[GitHub repository link]</a:t>
-            </a:r>
-            <a:endParaRPr lang="en-US" sz="1500" dirty="0"/>
-          </a:p>
-        </p:txBody>
-      </p:sp>
-      <p:sp>
-        <p:nvSpPr>
-          <p:cNvPr id="21" name="Text 19"/>
-          <p:cNvSpPr txBox="1"/>
-          <p:nvPr/>
-        </p:nvSpPr>
-        <p:spPr>
-          <a:xfrm>
-            <a:off x="640080" y="6355080"/>
-            <a:ext cx="10241280" cy="274320"/>
-          </a:xfrm>
-          <a:prstGeom prst="rect">
-            <a:avLst/>
-          </a:prstGeom>
-          <a:noFill/>
-          <a:ln/>
-        </p:spPr>
-        <p:txBody>
-          <a:bodyPr wrap="square" lIns="0" tIns="0" rIns="0" bIns="0" rtlCol="0" anchor="ctr"/>
-          <a:lstStyle/>
-          <a:p>
-            <a:pPr indent="0" marL="0">
-              <a:buNone/>
-            </a:pPr>
-            <a:r>
-              <a:rPr lang="en-US" sz="1100" dirty="0">
-                <a:solidFill>
-                  <a:srgbClr val="64748B"/>
-                </a:solidFill>
-                <a:latin typeface="Arial" pitchFamily="34" charset="0"/>
-                <a:ea typeface="Arial" pitchFamily="34" charset="-122"/>
-                <a:cs typeface="Arial" pitchFamily="34" charset="-120"/>
-              </a:rPr>
-              <a:t>Placeholders to be replaced with verified details before submission.</a:t>
-            </a:r>
-            <a:endParaRPr lang="en-US" sz="1100" dirty="0"/>
           </a:p>
         </p:txBody>
       </p:sp>
@@ -6727,7 +6318,7 @@
           </a:prstGeom>
           <a:extLst>
             <a:ext uri="{C572A759-6A51-4108-AA02-DFA0A04FC94B}">
-              <ma14:wrappingTextBoxFlag xmlns:ma14="http://schemas.microsoft.com/office/mac/drawingml/2011/main" val="0"/>
+              <ma14:wrappingTextBoxFlag xmlns:ma14="http://schemas.microsoft.com/office/mac/drawingml/2011/main" xmlns="" val="0"/>
             </a:ext>
           </a:extLst>
         </p:spPr>
@@ -6748,7 +6339,7 @@
           <a:p>
             <a:pPr algn="r"/>
             <a:fld id="{F7021451-1387-4CA6-816F-3879F97B5CBC}" type="slidenum">
-              <a:rPr b="0" lang="en-US"/>
+              <a:rPr lang="en-US" b="0"/>
               <a:t>12</a:t>
             </a:fld>
             <a:endParaRPr lang="en-US"/>
@@ -6801,7 +6392,7 @@
           <a:bodyPr wrap="square" lIns="0" tIns="0" rIns="0" bIns="0" rtlCol="0" anchor="ctr"/>
           <a:lstStyle/>
           <a:p>
-            <a:pPr indent="0" marL="0">
+            <a:pPr marL="0" indent="0">
               <a:buNone/>
             </a:pPr>
             <a:r>
@@ -6846,7 +6437,7 @@
       </p:sp>
       <p:graphicFrame>
         <p:nvGraphicFramePr>
-          <p:cNvPr id="4" name="Chart 0" descr=""/>
+          <p:cNvPr id="4" name="Chart 0"/>
           <p:cNvGraphicFramePr/>
           <p:nvPr/>
         </p:nvGraphicFramePr>
@@ -6854,9 +6445,9 @@
           <a:off x="640080" y="1645920"/>
           <a:ext cx="6949440" cy="4206240"/>
         </p:xfrm>
-        <a:graphic xmlns:a="http://schemas.openxmlformats.org/drawingml/2006/main">
+        <a:graphic>
           <a:graphicData uri="http://schemas.openxmlformats.org/drawingml/2006/chart">
-            <c:chart xmlns:c="http://schemas.openxmlformats.org/drawingml/2006/chart" r:id="rId1"/>
+            <c:chart xmlns:c="http://schemas.openxmlformats.org/drawingml/2006/chart" xmlns:r="http://schemas.openxmlformats.org/officeDocument/2006/relationships" r:id="rId3"/>
           </a:graphicData>
         </a:graphic>
       </p:graphicFrame>
@@ -6881,7 +6472,7 @@
           <a:bodyPr wrap="square" lIns="0" tIns="0" rIns="0" bIns="0" rtlCol="0" anchor="t"/>
           <a:lstStyle/>
           <a:p>
-            <a:pPr indent="0" marL="0">
+            <a:pPr marL="0" indent="0">
               <a:buNone/>
             </a:pPr>
             <a:r>
@@ -6947,7 +6538,7 @@
           <a:bodyPr wrap="square" lIns="0" tIns="0" rIns="0" bIns="0" rtlCol="0" anchor="t"/>
           <a:lstStyle/>
           <a:p>
-            <a:pPr indent="0" marL="0">
+            <a:pPr marL="0" indent="0">
               <a:buNone/>
             </a:pPr>
             <a:r>
@@ -6986,7 +6577,7 @@
           <a:bodyPr wrap="square" lIns="0" tIns="0" rIns="0" bIns="0" rtlCol="0" anchor="t"/>
           <a:lstStyle/>
           <a:p>
-            <a:pPr indent="0" marL="0">
+            <a:pPr marL="0" indent="0">
               <a:buNone/>
             </a:pPr>
             <a:r>
@@ -7052,7 +6643,7 @@
           <a:bodyPr wrap="square" lIns="0" tIns="0" rIns="0" bIns="0" rtlCol="0" anchor="t"/>
           <a:lstStyle/>
           <a:p>
-            <a:pPr indent="0" marL="0">
+            <a:pPr marL="0" indent="0">
               <a:buNone/>
             </a:pPr>
             <a:r>
@@ -7091,7 +6682,7 @@
           <a:bodyPr wrap="square" lIns="0" tIns="0" rIns="0" bIns="0" rtlCol="0" anchor="t"/>
           <a:lstStyle/>
           <a:p>
-            <a:pPr indent="0" marL="0">
+            <a:pPr marL="0" indent="0">
               <a:buNone/>
             </a:pPr>
             <a:r>
@@ -7157,7 +6748,7 @@
           <a:bodyPr wrap="square" lIns="0" tIns="0" rIns="0" bIns="0" rtlCol="0" anchor="t"/>
           <a:lstStyle/>
           <a:p>
-            <a:pPr indent="0" marL="0">
+            <a:pPr marL="0" indent="0">
               <a:buNone/>
             </a:pPr>
             <a:r>
@@ -7196,7 +6787,7 @@
           <a:bodyPr wrap="square" lIns="0" tIns="0" rIns="0" bIns="0" rtlCol="0" anchor="t"/>
           <a:lstStyle/>
           <a:p>
-            <a:pPr indent="0" marL="0">
+            <a:pPr marL="0" indent="0">
               <a:buNone/>
             </a:pPr>
             <a:r>
@@ -7235,7 +6826,7 @@
           <a:bodyPr wrap="square" lIns="0" tIns="0" rIns="0" bIns="0" rtlCol="0" anchor="ctr"/>
           <a:lstStyle/>
           <a:p>
-            <a:pPr indent="0" marL="0">
+            <a:pPr marL="0" indent="0">
               <a:buNone/>
             </a:pPr>
             <a:r>
@@ -7273,7 +6864,7 @@
           </a:prstGeom>
           <a:extLst>
             <a:ext uri="{C572A759-6A51-4108-AA02-DFA0A04FC94B}">
-              <ma14:wrappingTextBoxFlag xmlns:ma14="http://schemas.microsoft.com/office/mac/drawingml/2011/main" val="0"/>
+              <ma14:wrappingTextBoxFlag xmlns:ma14="http://schemas.microsoft.com/office/mac/drawingml/2011/main" xmlns="" val="0"/>
             </a:ext>
           </a:extLst>
         </p:spPr>
@@ -7294,7 +6885,7 @@
           <a:p>
             <a:pPr algn="r"/>
             <a:fld id="{F7021451-1387-4CA6-816F-3879F97B5CBC}" type="slidenum">
-              <a:rPr b="0" lang="en-US"/>
+              <a:rPr lang="en-US" b="0"/>
               <a:t>2</a:t>
             </a:fld>
             <a:endParaRPr lang="en-US"/>
@@ -7347,7 +6938,7 @@
           <a:bodyPr wrap="square" lIns="0" tIns="0" rIns="0" bIns="0" rtlCol="0" anchor="ctr"/>
           <a:lstStyle/>
           <a:p>
-            <a:pPr indent="0" marL="0">
+            <a:pPr marL="0" indent="0">
               <a:buNone/>
             </a:pPr>
             <a:r>
@@ -7411,7 +7002,7 @@
           <a:bodyPr wrap="square" lIns="0" tIns="0" rIns="0" bIns="0" rtlCol="0" anchor="t"/>
           <a:lstStyle/>
           <a:p>
-            <a:pPr indent="0" marL="0">
+            <a:pPr marL="0" indent="0">
               <a:buNone/>
             </a:pPr>
             <a:r>
@@ -7477,7 +7068,7 @@
           <a:bodyPr wrap="square" lIns="0" tIns="0" rIns="0" bIns="0" rtlCol="0" anchor="t"/>
           <a:lstStyle/>
           <a:p>
-            <a:pPr indent="0" marL="0">
+            <a:pPr marL="0" indent="0">
               <a:buNone/>
             </a:pPr>
             <a:r>
@@ -7516,7 +7107,7 @@
           <a:bodyPr wrap="square" lIns="0" tIns="0" rIns="0" bIns="0" rtlCol="0" anchor="t"/>
           <a:lstStyle/>
           <a:p>
-            <a:pPr indent="0" marL="0">
+            <a:pPr marL="0" indent="0">
               <a:buNone/>
             </a:pPr>
             <a:r>
@@ -7582,7 +7173,7 @@
           <a:bodyPr wrap="square" lIns="0" tIns="0" rIns="0" bIns="0" rtlCol="0" anchor="t"/>
           <a:lstStyle/>
           <a:p>
-            <a:pPr indent="0" marL="0">
+            <a:pPr marL="0" indent="0">
               <a:buNone/>
             </a:pPr>
             <a:r>
@@ -7621,7 +7212,7 @@
           <a:bodyPr wrap="square" lIns="0" tIns="0" rIns="0" bIns="0" rtlCol="0" anchor="t"/>
           <a:lstStyle/>
           <a:p>
-            <a:pPr indent="0" marL="0">
+            <a:pPr marL="0" indent="0">
               <a:buNone/>
             </a:pPr>
             <a:r>
@@ -7687,7 +7278,7 @@
           <a:bodyPr wrap="square" lIns="0" tIns="0" rIns="0" bIns="0" rtlCol="0" anchor="t"/>
           <a:lstStyle/>
           <a:p>
-            <a:pPr indent="0" marL="0">
+            <a:pPr marL="0" indent="0">
               <a:buNone/>
             </a:pPr>
             <a:r>
@@ -7726,7 +7317,7 @@
           <a:bodyPr wrap="square" lIns="0" tIns="0" rIns="0" bIns="0" rtlCol="0" anchor="t"/>
           <a:lstStyle/>
           <a:p>
-            <a:pPr indent="0" marL="0">
+            <a:pPr marL="0" indent="0">
               <a:buNone/>
             </a:pPr>
             <a:r>
@@ -7765,7 +7356,7 @@
           <a:bodyPr wrap="square" lIns="0" tIns="0" rIns="0" bIns="0" rtlCol="0" anchor="t"/>
           <a:lstStyle/>
           <a:p>
-            <a:pPr algn="ctr" indent="0" marL="0">
+            <a:pPr marL="0" indent="0" algn="ctr">
               <a:buNone/>
             </a:pPr>
             <a:r>
@@ -7804,7 +7395,7 @@
           <a:bodyPr wrap="square" lIns="0" tIns="0" rIns="0" bIns="0" rtlCol="0" anchor="t"/>
           <a:lstStyle/>
           <a:p>
-            <a:pPr algn="ctr" indent="0" marL="0">
+            <a:pPr marL="0" indent="0" algn="ctr">
               <a:buNone/>
             </a:pPr>
             <a:r>
@@ -7842,7 +7433,7 @@
           </a:prstGeom>
           <a:extLst>
             <a:ext uri="{C572A759-6A51-4108-AA02-DFA0A04FC94B}">
-              <ma14:wrappingTextBoxFlag xmlns:ma14="http://schemas.microsoft.com/office/mac/drawingml/2011/main" val="0"/>
+              <ma14:wrappingTextBoxFlag xmlns:ma14="http://schemas.microsoft.com/office/mac/drawingml/2011/main" xmlns="" val="0"/>
             </a:ext>
           </a:extLst>
         </p:spPr>
@@ -7863,7 +7454,7 @@
           <a:p>
             <a:pPr algn="r"/>
             <a:fld id="{F7021451-1387-4CA6-816F-3879F97B5CBC}" type="slidenum">
-              <a:rPr b="0" lang="en-US"/>
+              <a:rPr lang="en-US" b="0"/>
               <a:t>3</a:t>
             </a:fld>
             <a:endParaRPr lang="en-US"/>
@@ -7916,7 +7507,7 @@
           <a:bodyPr wrap="square" lIns="0" tIns="0" rIns="0" bIns="0" rtlCol="0" anchor="ctr"/>
           <a:lstStyle/>
           <a:p>
-            <a:pPr indent="0" marL="0">
+            <a:pPr marL="0" indent="0">
               <a:buNone/>
             </a:pPr>
             <a:r>
@@ -8032,7 +7623,7 @@
           <a:bodyPr wrap="square" lIns="0" tIns="0" rIns="0" bIns="0" rtlCol="0" anchor="ctr"/>
           <a:lstStyle/>
           <a:p>
-            <a:pPr indent="0" marL="0">
+            <a:pPr marL="0" indent="0">
               <a:buNone/>
             </a:pPr>
             <a:r>
@@ -8098,7 +7689,7 @@
           <a:bodyPr wrap="square" lIns="0" tIns="0" rIns="0" bIns="0" rtlCol="0" anchor="t"/>
           <a:lstStyle/>
           <a:p>
-            <a:pPr indent="0" marL="0">
+            <a:pPr marL="0" indent="0">
               <a:buNone/>
             </a:pPr>
             <a:r>
@@ -8137,7 +7728,7 @@
           <a:bodyPr wrap="square" lIns="0" tIns="0" rIns="0" bIns="0" rtlCol="0" anchor="t"/>
           <a:lstStyle/>
           <a:p>
-            <a:pPr indent="0" marL="0">
+            <a:pPr marL="0" indent="0">
               <a:buNone/>
             </a:pPr>
             <a:r>
@@ -8203,7 +7794,7 @@
           <a:bodyPr wrap="square" lIns="0" tIns="0" rIns="0" bIns="0" rtlCol="0" anchor="t"/>
           <a:lstStyle/>
           <a:p>
-            <a:pPr indent="0" marL="0">
+            <a:pPr marL="0" indent="0">
               <a:buNone/>
             </a:pPr>
             <a:r>
@@ -8242,7 +7833,7 @@
           <a:bodyPr wrap="square" lIns="0" tIns="0" rIns="0" bIns="0" rtlCol="0" anchor="t"/>
           <a:lstStyle/>
           <a:p>
-            <a:pPr indent="0" marL="0">
+            <a:pPr marL="0" indent="0">
               <a:buNone/>
             </a:pPr>
             <a:r>
@@ -8308,7 +7899,7 @@
           <a:bodyPr wrap="square" lIns="0" tIns="0" rIns="0" bIns="0" rtlCol="0" anchor="t"/>
           <a:lstStyle/>
           <a:p>
-            <a:pPr indent="0" marL="0">
+            <a:pPr marL="0" indent="0">
               <a:buNone/>
             </a:pPr>
             <a:r>
@@ -8347,7 +7938,7 @@
           <a:bodyPr wrap="square" lIns="0" tIns="0" rIns="0" bIns="0" rtlCol="0" anchor="t"/>
           <a:lstStyle/>
           <a:p>
-            <a:pPr indent="0" marL="0">
+            <a:pPr marL="0" indent="0">
               <a:buNone/>
             </a:pPr>
             <a:r>
@@ -8385,7 +7976,7 @@
           </a:prstGeom>
           <a:extLst>
             <a:ext uri="{C572A759-6A51-4108-AA02-DFA0A04FC94B}">
-              <ma14:wrappingTextBoxFlag xmlns:ma14="http://schemas.microsoft.com/office/mac/drawingml/2011/main" val="0"/>
+              <ma14:wrappingTextBoxFlag xmlns:ma14="http://schemas.microsoft.com/office/mac/drawingml/2011/main" xmlns="" val="0"/>
             </a:ext>
           </a:extLst>
         </p:spPr>
@@ -8406,7 +7997,7 @@
           <a:p>
             <a:pPr algn="r"/>
             <a:fld id="{F7021451-1387-4CA6-816F-3879F97B5CBC}" type="slidenum">
-              <a:rPr b="0" lang="en-US"/>
+              <a:rPr lang="en-US" b="0"/>
               <a:t>4</a:t>
             </a:fld>
             <a:endParaRPr lang="en-US"/>
@@ -8459,7 +8050,7 @@
           <a:bodyPr wrap="square" lIns="0" tIns="0" rIns="0" bIns="0" rtlCol="0" anchor="ctr"/>
           <a:lstStyle/>
           <a:p>
-            <a:pPr indent="0" marL="0">
+            <a:pPr marL="0" indent="0">
               <a:buNone/>
             </a:pPr>
             <a:r>
@@ -8550,7 +8141,7 @@
           <a:bodyPr wrap="square" lIns="0" tIns="0" rIns="0" bIns="0" rtlCol="0" anchor="t"/>
           <a:lstStyle/>
           <a:p>
-            <a:pPr indent="0" marL="0">
+            <a:pPr marL="0" indent="0">
               <a:buNone/>
             </a:pPr>
             <a:r>
@@ -8589,7 +8180,7 @@
           <a:bodyPr wrap="square" lIns="0" tIns="0" rIns="0" bIns="0" rtlCol="0" anchor="t"/>
           <a:lstStyle/>
           <a:p>
-            <a:pPr indent="0" marL="0">
+            <a:pPr marL="0" indent="0">
               <a:buNone/>
             </a:pPr>
             <a:r>
@@ -8655,7 +8246,7 @@
           <a:bodyPr wrap="square" lIns="0" tIns="0" rIns="0" bIns="0" rtlCol="0" anchor="t"/>
           <a:lstStyle/>
           <a:p>
-            <a:pPr indent="0" marL="0">
+            <a:pPr marL="0" indent="0">
               <a:buNone/>
             </a:pPr>
             <a:r>
@@ -8694,7 +8285,7 @@
           <a:bodyPr wrap="square" lIns="0" tIns="0" rIns="0" bIns="0" rtlCol="0" anchor="t"/>
           <a:lstStyle/>
           <a:p>
-            <a:pPr indent="0" marL="0">
+            <a:pPr marL="0" indent="0">
               <a:buNone/>
             </a:pPr>
             <a:r>
@@ -8760,7 +8351,7 @@
           <a:bodyPr wrap="square" lIns="0" tIns="0" rIns="0" bIns="0" rtlCol="0" anchor="t"/>
           <a:lstStyle/>
           <a:p>
-            <a:pPr indent="0" marL="0">
+            <a:pPr marL="0" indent="0">
               <a:buNone/>
             </a:pPr>
             <a:r>
@@ -8799,7 +8390,7 @@
           <a:bodyPr wrap="square" lIns="0" tIns="0" rIns="0" bIns="0" rtlCol="0" anchor="t"/>
           <a:lstStyle/>
           <a:p>
-            <a:pPr indent="0" marL="0">
+            <a:pPr marL="0" indent="0">
               <a:buNone/>
             </a:pPr>
             <a:r>
@@ -8865,7 +8456,7 @@
           <a:bodyPr wrap="square" lIns="0" tIns="0" rIns="0" bIns="0" rtlCol="0" anchor="t"/>
           <a:lstStyle/>
           <a:p>
-            <a:pPr indent="0" marL="0">
+            <a:pPr marL="0" indent="0">
               <a:buNone/>
             </a:pPr>
             <a:r>
@@ -8904,7 +8495,7 @@
           <a:bodyPr wrap="square" lIns="0" tIns="0" rIns="0" bIns="0" rtlCol="0" anchor="t"/>
           <a:lstStyle/>
           <a:p>
-            <a:pPr indent="0" marL="0">
+            <a:pPr marL="0" indent="0">
               <a:buNone/>
             </a:pPr>
             <a:r>
@@ -8970,7 +8561,7 @@
           <a:bodyPr wrap="square" lIns="0" tIns="0" rIns="0" bIns="0" rtlCol="0" anchor="t"/>
           <a:lstStyle/>
           <a:p>
-            <a:pPr indent="0" marL="0">
+            <a:pPr marL="0" indent="0">
               <a:buNone/>
             </a:pPr>
             <a:r>
@@ -9009,7 +8600,7 @@
           <a:bodyPr wrap="square" lIns="0" tIns="0" rIns="0" bIns="0" rtlCol="0" anchor="t"/>
           <a:lstStyle/>
           <a:p>
-            <a:pPr indent="0" marL="0">
+            <a:pPr marL="0" indent="0">
               <a:buNone/>
             </a:pPr>
             <a:r>
@@ -9075,7 +8666,7 @@
           <a:bodyPr wrap="square" lIns="0" tIns="0" rIns="0" bIns="0" rtlCol="0" anchor="t"/>
           <a:lstStyle/>
           <a:p>
-            <a:pPr indent="0" marL="0">
+            <a:pPr marL="0" indent="0">
               <a:buNone/>
             </a:pPr>
             <a:r>
@@ -9114,7 +8705,7 @@
           <a:bodyPr wrap="square" lIns="0" tIns="0" rIns="0" bIns="0" rtlCol="0" anchor="t"/>
           <a:lstStyle/>
           <a:p>
-            <a:pPr indent="0" marL="0">
+            <a:pPr marL="0" indent="0">
               <a:buNone/>
             </a:pPr>
             <a:r>
@@ -9180,7 +8771,7 @@
           <a:bodyPr wrap="square" lIns="0" tIns="0" rIns="0" bIns="0" rtlCol="0" anchor="t"/>
           <a:lstStyle/>
           <a:p>
-            <a:pPr indent="0" marL="0">
+            <a:pPr marL="0" indent="0">
               <a:buNone/>
             </a:pPr>
             <a:r>
@@ -9219,7 +8810,7 @@
           <a:bodyPr wrap="square" lIns="0" tIns="0" rIns="0" bIns="0" rtlCol="0" anchor="t"/>
           <a:lstStyle/>
           <a:p>
-            <a:pPr indent="0" marL="0">
+            <a:pPr marL="0" indent="0">
               <a:buNone/>
             </a:pPr>
             <a:r>
@@ -9402,7 +8993,7 @@
           <a:bodyPr wrap="square" lIns="0" tIns="0" rIns="0" bIns="0" rtlCol="0" anchor="ctr"/>
           <a:lstStyle/>
           <a:p>
-            <a:pPr indent="0" marL="0">
+            <a:pPr marL="0" indent="0">
               <a:buNone/>
             </a:pPr>
             <a:r>
@@ -9422,7 +9013,7 @@
       </p:sp>
       <p:sp>
         <p:nvSpPr>
-          <p:cNvPr id="25" name="Slide Number Placeholder 0"/>
+          <p:cNvPr id="32" name="Slide Number Placeholder 0"/>
           <p:cNvSpPr>
             <a:spLocks noGrp="1"/>
           </p:cNvSpPr>
@@ -9440,7 +9031,7 @@
           </a:prstGeom>
           <a:extLst>
             <a:ext uri="{C572A759-6A51-4108-AA02-DFA0A04FC94B}">
-              <ma14:wrappingTextBoxFlag xmlns:ma14="http://schemas.microsoft.com/office/mac/drawingml/2011/main" val="0"/>
+              <ma14:wrappingTextBoxFlag xmlns:ma14="http://schemas.microsoft.com/office/mac/drawingml/2011/main" xmlns="" val="0"/>
             </a:ext>
           </a:extLst>
         </p:spPr>
@@ -9461,7 +9052,7 @@
           <a:p>
             <a:pPr algn="r"/>
             <a:fld id="{F7021451-1387-4CA6-816F-3879F97B5CBC}" type="slidenum">
-              <a:rPr b="0" lang="en-US"/>
+              <a:rPr lang="en-US" b="0"/>
               <a:t>5</a:t>
             </a:fld>
             <a:endParaRPr lang="en-US"/>
@@ -9514,7 +9105,7 @@
           <a:bodyPr wrap="square" lIns="0" tIns="0" rIns="0" bIns="0" rtlCol="0" anchor="ctr"/>
           <a:lstStyle/>
           <a:p>
-            <a:pPr indent="0" marL="0">
+            <a:pPr marL="0" indent="0">
               <a:buNone/>
             </a:pPr>
             <a:r>
@@ -9559,15 +9150,15 @@
       </p:sp>
       <p:pic>
         <p:nvPicPr>
-          <p:cNvPr id="4" name="Image 0" descr="img/c_dash.png">    </p:cNvPr>
+          <p:cNvPr id="4" name="Image 0" descr="img/c_dash.png"/>
           <p:cNvPicPr>
             <a:picLocks noChangeAspect="1"/>
           </p:cNvPicPr>
           <p:nvPr/>
         </p:nvPicPr>
         <p:blipFill>
-          <a:blip r:embed="rId1"/>
-          <a:srcRect l="0" r="0" t="0" b="0"/>
+          <a:blip r:embed="rId3"/>
+          <a:srcRect/>
           <a:stretch/>
         </p:blipFill>
         <p:spPr>
@@ -9626,7 +9217,7 @@
           <a:bodyPr wrap="square" lIns="0" tIns="0" rIns="0" bIns="0" rtlCol="0" anchor="t"/>
           <a:lstStyle/>
           <a:p>
-            <a:pPr indent="0" marL="0">
+            <a:pPr marL="0" indent="0">
               <a:buNone/>
             </a:pPr>
             <a:r>
@@ -9665,7 +9256,7 @@
           <a:bodyPr wrap="square" lIns="0" tIns="0" rIns="0" bIns="0" rtlCol="0" anchor="t"/>
           <a:lstStyle/>
           <a:p>
-            <a:pPr indent="0" marL="0">
+            <a:pPr marL="0" indent="0">
               <a:buNone/>
             </a:pPr>
             <a:r>
@@ -9729,7 +9320,7 @@
           <a:bodyPr wrap="square" lIns="0" tIns="0" rIns="0" bIns="0" rtlCol="0" anchor="t"/>
           <a:lstStyle/>
           <a:p>
-            <a:pPr indent="0" marL="0">
+            <a:pPr marL="0" indent="0">
               <a:buNone/>
             </a:pPr>
             <a:r>
@@ -9768,7 +9359,7 @@
           <a:bodyPr wrap="square" lIns="0" tIns="0" rIns="0" bIns="0" rtlCol="0" anchor="t"/>
           <a:lstStyle/>
           <a:p>
-            <a:pPr indent="0" marL="0">
+            <a:pPr marL="0" indent="0">
               <a:buNone/>
             </a:pPr>
             <a:r>
@@ -9832,7 +9423,7 @@
           <a:bodyPr wrap="square" lIns="0" tIns="0" rIns="0" bIns="0" rtlCol="0" anchor="t"/>
           <a:lstStyle/>
           <a:p>
-            <a:pPr indent="0" marL="0">
+            <a:pPr marL="0" indent="0">
               <a:buNone/>
             </a:pPr>
             <a:r>
@@ -9871,7 +9462,7 @@
           <a:bodyPr wrap="square" lIns="0" tIns="0" rIns="0" bIns="0" rtlCol="0" anchor="t"/>
           <a:lstStyle/>
           <a:p>
-            <a:pPr indent="0" marL="0">
+            <a:pPr marL="0" indent="0">
               <a:buNone/>
             </a:pPr>
             <a:r>
@@ -9910,7 +9501,7 @@
           <a:bodyPr wrap="square" lIns="0" tIns="0" rIns="0" bIns="0" rtlCol="0" anchor="ctr"/>
           <a:lstStyle/>
           <a:p>
-            <a:pPr indent="0" marL="0">
+            <a:pPr marL="0" indent="0">
               <a:buNone/>
             </a:pPr>
             <a:r>
@@ -9948,7 +9539,7 @@
           </a:prstGeom>
           <a:extLst>
             <a:ext uri="{C572A759-6A51-4108-AA02-DFA0A04FC94B}">
-              <ma14:wrappingTextBoxFlag xmlns:ma14="http://schemas.microsoft.com/office/mac/drawingml/2011/main" val="0"/>
+              <ma14:wrappingTextBoxFlag xmlns:ma14="http://schemas.microsoft.com/office/mac/drawingml/2011/main" xmlns="" val="0"/>
             </a:ext>
           </a:extLst>
         </p:spPr>
@@ -9969,7 +9560,7 @@
           <a:p>
             <a:pPr algn="r"/>
             <a:fld id="{F7021451-1387-4CA6-816F-3879F97B5CBC}" type="slidenum">
-              <a:rPr b="0" lang="en-US"/>
+              <a:rPr lang="en-US" b="0"/>
               <a:t>6</a:t>
             </a:fld>
             <a:endParaRPr lang="en-US"/>
@@ -10022,7 +9613,7 @@
           <a:bodyPr wrap="square" lIns="0" tIns="0" rIns="0" bIns="0" rtlCol="0" anchor="ctr"/>
           <a:lstStyle/>
           <a:p>
-            <a:pPr indent="0" marL="0">
+            <a:pPr marL="0" indent="0">
               <a:buNone/>
             </a:pPr>
             <a:r>
@@ -10086,7 +9677,7 @@
           <a:bodyPr wrap="square" lIns="0" tIns="0" rIns="0" bIns="0" rtlCol="0" anchor="t"/>
           <a:lstStyle/>
           <a:p>
-            <a:pPr indent="0" marL="0">
+            <a:pPr marL="0" indent="0">
               <a:buNone/>
             </a:pPr>
             <a:r>
@@ -10106,15 +9697,15 @@
       </p:sp>
       <p:pic>
         <p:nvPicPr>
-          <p:cNvPr id="5" name="Image 0" descr="img/c_before.png">    </p:cNvPr>
+          <p:cNvPr id="5" name="Image 0" descr="img/c_before.png"/>
           <p:cNvPicPr>
             <a:picLocks noChangeAspect="1"/>
           </p:cNvPicPr>
           <p:nvPr/>
         </p:nvPicPr>
         <p:blipFill>
-          <a:blip r:embed="rId1"/>
-          <a:srcRect l="0" r="0" t="0" b="0"/>
+          <a:blip r:embed="rId3"/>
+          <a:srcRect/>
           <a:stretch/>
         </p:blipFill>
         <p:spPr>
@@ -10148,7 +9739,7 @@
           <a:bodyPr wrap="square" lIns="0" tIns="0" rIns="0" bIns="0" rtlCol="0" anchor="t"/>
           <a:lstStyle/>
           <a:p>
-            <a:pPr indent="0" marL="0">
+            <a:pPr marL="0" indent="0">
               <a:buNone/>
             </a:pPr>
             <a:r>
@@ -10168,15 +9759,15 @@
       </p:sp>
       <p:pic>
         <p:nvPicPr>
-          <p:cNvPr id="7" name="Image 1" descr="img/c_after.png">    </p:cNvPr>
+          <p:cNvPr id="7" name="Image 1" descr="img/c_after.png"/>
           <p:cNvPicPr>
             <a:picLocks noChangeAspect="1"/>
           </p:cNvPicPr>
           <p:nvPr/>
         </p:nvPicPr>
         <p:blipFill>
-          <a:blip r:embed="rId2"/>
-          <a:srcRect l="0" r="0" t="0" b="0"/>
+          <a:blip r:embed="rId4"/>
+          <a:srcRect/>
           <a:stretch/>
         </p:blipFill>
         <p:spPr>
@@ -10210,7 +9801,7 @@
           <a:bodyPr wrap="square" lIns="0" tIns="0" rIns="0" bIns="0" rtlCol="0" anchor="ctr"/>
           <a:lstStyle/>
           <a:p>
-            <a:pPr indent="0" marL="0">
+            <a:pPr marL="0" indent="0">
               <a:buNone/>
             </a:pPr>
             <a:r>
@@ -10249,7 +9840,7 @@
           <a:bodyPr wrap="square" lIns="0" tIns="0" rIns="0" bIns="0" rtlCol="0" anchor="ctr"/>
           <a:lstStyle/>
           <a:p>
-            <a:pPr algn="ctr" indent="0" marL="0">
+            <a:pPr marL="0" indent="0" algn="ctr">
               <a:buNone/>
             </a:pPr>
             <a:r>
@@ -10288,7 +9879,7 @@
           <a:bodyPr wrap="square" lIns="0" tIns="0" rIns="0" bIns="0" rtlCol="0" anchor="ctr"/>
           <a:lstStyle/>
           <a:p>
-            <a:pPr indent="0" marL="0">
+            <a:pPr marL="0" indent="0">
               <a:buNone/>
             </a:pPr>
             <a:r>
@@ -10327,7 +9918,7 @@
           <a:bodyPr wrap="square" lIns="0" tIns="0" rIns="0" bIns="0" rtlCol="0" anchor="t"/>
           <a:lstStyle/>
           <a:p>
-            <a:pPr indent="0" marL="0">
+            <a:pPr marL="0" indent="0">
               <a:buNone/>
             </a:pPr>
             <a:r>
@@ -10366,7 +9957,7 @@
           <a:bodyPr wrap="square" lIns="0" tIns="0" rIns="0" bIns="0" rtlCol="0" anchor="t"/>
           <a:lstStyle/>
           <a:p>
-            <a:pPr indent="0" marL="0">
+            <a:pPr marL="0" indent="0">
               <a:buNone/>
             </a:pPr>
             <a:r>
@@ -10432,7 +10023,7 @@
           <a:bodyPr wrap="square" lIns="0" tIns="0" rIns="0" bIns="0" rtlCol="0" anchor="ctr"/>
           <a:lstStyle/>
           <a:p>
-            <a:pPr indent="0" marL="0">
+            <a:pPr marL="0" indent="0">
               <a:buNone/>
             </a:pPr>
             <a:r>
@@ -10470,7 +10061,7 @@
           </a:prstGeom>
           <a:extLst>
             <a:ext uri="{C572A759-6A51-4108-AA02-DFA0A04FC94B}">
-              <ma14:wrappingTextBoxFlag xmlns:ma14="http://schemas.microsoft.com/office/mac/drawingml/2011/main" val="0"/>
+              <ma14:wrappingTextBoxFlag xmlns:ma14="http://schemas.microsoft.com/office/mac/drawingml/2011/main" xmlns="" val="0"/>
             </a:ext>
           </a:extLst>
         </p:spPr>
@@ -10491,7 +10082,7 @@
           <a:p>
             <a:pPr algn="r"/>
             <a:fld id="{F7021451-1387-4CA6-816F-3879F97B5CBC}" type="slidenum">
-              <a:rPr b="0" lang="en-US"/>
+              <a:rPr lang="en-US" b="0"/>
               <a:t>7</a:t>
             </a:fld>
             <a:endParaRPr lang="en-US"/>
@@ -10544,7 +10135,7 @@
           <a:bodyPr wrap="square" lIns="0" tIns="0" rIns="0" bIns="0" rtlCol="0" anchor="ctr"/>
           <a:lstStyle/>
           <a:p>
-            <a:pPr indent="0" marL="0">
+            <a:pPr marL="0" indent="0">
               <a:buNone/>
             </a:pPr>
             <a:r>
@@ -10589,15 +10180,15 @@
       </p:sp>
       <p:pic>
         <p:nvPicPr>
-          <p:cNvPr id="4" name="Image 0" descr="img/c_whatif.png">    </p:cNvPr>
+          <p:cNvPr id="4" name="Image 0" descr="img/c_whatif.png"/>
           <p:cNvPicPr>
             <a:picLocks noChangeAspect="1"/>
           </p:cNvPicPr>
           <p:nvPr/>
         </p:nvPicPr>
         <p:blipFill>
-          <a:blip r:embed="rId1"/>
-          <a:srcRect l="0" r="0" t="0" b="0"/>
+          <a:blip r:embed="rId3"/>
+          <a:srcRect/>
           <a:stretch/>
         </p:blipFill>
         <p:spPr>
@@ -10631,7 +10222,7 @@
           <a:bodyPr wrap="square" lIns="0" tIns="0" rIns="0" bIns="0" rtlCol="0" anchor="ctr"/>
           <a:lstStyle/>
           <a:p>
-            <a:pPr indent="0" marL="0">
+            <a:pPr marL="0" indent="0">
               <a:buNone/>
             </a:pPr>
             <a:r>
@@ -10670,7 +10261,7 @@
           <a:bodyPr wrap="square" lIns="0" tIns="0" rIns="0" bIns="0" rtlCol="0" anchor="t"/>
           <a:lstStyle/>
           <a:p>
-            <a:pPr indent="0" marL="0">
+            <a:pPr marL="0" indent="0">
               <a:buNone/>
             </a:pPr>
             <a:r>
@@ -10736,7 +10327,7 @@
           <a:bodyPr wrap="square" lIns="0" tIns="0" rIns="0" bIns="0" rtlCol="0" anchor="t"/>
           <a:lstStyle/>
           <a:p>
-            <a:pPr indent="0" marL="0">
+            <a:pPr marL="0" indent="0">
               <a:buNone/>
             </a:pPr>
             <a:r>
@@ -10775,7 +10366,7 @@
           <a:bodyPr wrap="square" lIns="0" tIns="0" rIns="0" bIns="0" rtlCol="0" anchor="t"/>
           <a:lstStyle/>
           <a:p>
-            <a:pPr indent="0" marL="0">
+            <a:pPr marL="0" indent="0">
               <a:buNone/>
             </a:pPr>
             <a:r>
@@ -10814,7 +10405,7 @@
           <a:bodyPr wrap="square" lIns="0" tIns="0" rIns="0" bIns="0" rtlCol="0" anchor="t"/>
           <a:lstStyle/>
           <a:p>
-            <a:pPr indent="0" marL="0">
+            <a:pPr marL="0" indent="0">
               <a:buNone/>
             </a:pPr>
             <a:r>
@@ -10853,7 +10444,7 @@
           <a:bodyPr wrap="square" lIns="0" tIns="0" rIns="0" bIns="0" rtlCol="0" anchor="ctr"/>
           <a:lstStyle/>
           <a:p>
-            <a:pPr indent="0" marL="0">
+            <a:pPr marL="0" indent="0">
               <a:buNone/>
             </a:pPr>
             <a:r>
@@ -10891,7 +10482,7 @@
           </a:prstGeom>
           <a:extLst>
             <a:ext uri="{C572A759-6A51-4108-AA02-DFA0A04FC94B}">
-              <ma14:wrappingTextBoxFlag xmlns:ma14="http://schemas.microsoft.com/office/mac/drawingml/2011/main" val="0"/>
+              <ma14:wrappingTextBoxFlag xmlns:ma14="http://schemas.microsoft.com/office/mac/drawingml/2011/main" xmlns="" val="0"/>
             </a:ext>
           </a:extLst>
         </p:spPr>
@@ -10912,7 +10503,7 @@
           <a:p>
             <a:pPr algn="r"/>
             <a:fld id="{F7021451-1387-4CA6-816F-3879F97B5CBC}" type="slidenum">
-              <a:rPr b="0" lang="en-US"/>
+              <a:rPr lang="en-US" b="0"/>
               <a:t>8</a:t>
             </a:fld>
             <a:endParaRPr lang="en-US"/>
@@ -10965,7 +10556,7 @@
           <a:bodyPr wrap="square" lIns="0" tIns="0" rIns="0" bIns="0" rtlCol="0" anchor="ctr"/>
           <a:lstStyle/>
           <a:p>
-            <a:pPr indent="0" marL="0">
+            <a:pPr marL="0" indent="0">
               <a:buNone/>
             </a:pPr>
             <a:r>
@@ -11029,7 +10620,7 @@
           <a:bodyPr wrap="square" lIns="0" tIns="0" rIns="0" bIns="0" rtlCol="0" anchor="t"/>
           <a:lstStyle/>
           <a:p>
-            <a:pPr indent="0" marL="0">
+            <a:pPr marL="0" indent="0">
               <a:buNone/>
             </a:pPr>
             <a:r>
@@ -11068,7 +10659,7 @@
           <a:bodyPr wrap="square" lIns="0" tIns="0" rIns="0" bIns="0" rtlCol="0" anchor="t"/>
           <a:lstStyle/>
           <a:p>
-            <a:pPr indent="0" marL="0">
+            <a:pPr marL="0" indent="0">
               <a:buNone/>
             </a:pPr>
             <a:r>
@@ -11088,7 +10679,7 @@
       </p:sp>
       <p:graphicFrame>
         <p:nvGraphicFramePr>
-          <p:cNvPr id="6" name="Chart 0" descr=""/>
+          <p:cNvPr id="6" name="Chart 0"/>
           <p:cNvGraphicFramePr/>
           <p:nvPr/>
         </p:nvGraphicFramePr>
@@ -11096,9 +10687,9 @@
           <a:off x="640080" y="2286000"/>
           <a:ext cx="3474720" cy="3017520"/>
         </p:xfrm>
-        <a:graphic xmlns:a="http://schemas.openxmlformats.org/drawingml/2006/main">
+        <a:graphic>
           <a:graphicData uri="http://schemas.openxmlformats.org/drawingml/2006/chart">
-            <c:chart xmlns:c="http://schemas.openxmlformats.org/drawingml/2006/chart" r:id="rId1"/>
+            <c:chart xmlns:c="http://schemas.openxmlformats.org/drawingml/2006/chart" xmlns:r="http://schemas.openxmlformats.org/officeDocument/2006/relationships" r:id="rId3"/>
           </a:graphicData>
         </a:graphic>
       </p:graphicFrame>
@@ -11123,7 +10714,7 @@
           <a:bodyPr wrap="square" lIns="0" tIns="0" rIns="0" bIns="0" rtlCol="0" anchor="t"/>
           <a:lstStyle/>
           <a:p>
-            <a:pPr indent="0" marL="0">
+            <a:pPr marL="0" indent="0">
               <a:buNone/>
             </a:pPr>
             <a:r>
@@ -11162,7 +10753,7 @@
           <a:bodyPr wrap="square" lIns="0" tIns="0" rIns="0" bIns="0" rtlCol="0" anchor="t"/>
           <a:lstStyle/>
           <a:p>
-            <a:pPr indent="0" marL="0">
+            <a:pPr marL="0" indent="0">
               <a:buNone/>
             </a:pPr>
             <a:r>
@@ -11182,7 +10773,7 @@
       </p:sp>
       <p:graphicFrame>
         <p:nvGraphicFramePr>
-          <p:cNvPr id="9" name="Chart 1" descr=""/>
+          <p:cNvPr id="9" name="Chart 1"/>
           <p:cNvGraphicFramePr/>
           <p:nvPr/>
         </p:nvGraphicFramePr>
@@ -11190,9 +10781,9 @@
           <a:off x="4389120" y="2286000"/>
           <a:ext cx="3474720" cy="3017520"/>
         </p:xfrm>
-        <a:graphic xmlns:a="http://schemas.openxmlformats.org/drawingml/2006/main">
+        <a:graphic>
           <a:graphicData uri="http://schemas.openxmlformats.org/drawingml/2006/chart">
-            <c:chart xmlns:c="http://schemas.openxmlformats.org/drawingml/2006/chart" r:id="rId2"/>
+            <c:chart xmlns:c="http://schemas.openxmlformats.org/drawingml/2006/chart" xmlns:r="http://schemas.openxmlformats.org/officeDocument/2006/relationships" r:id="rId4"/>
           </a:graphicData>
         </a:graphic>
       </p:graphicFrame>
@@ -11217,7 +10808,7 @@
           <a:bodyPr wrap="square" lIns="0" tIns="0" rIns="0" bIns="0" rtlCol="0" anchor="t"/>
           <a:lstStyle/>
           <a:p>
-            <a:pPr indent="0" marL="0">
+            <a:pPr marL="0" indent="0">
               <a:buNone/>
             </a:pPr>
             <a:r>
@@ -11256,7 +10847,7 @@
           <a:bodyPr wrap="square" lIns="0" tIns="0" rIns="0" bIns="0" rtlCol="0" anchor="t"/>
           <a:lstStyle/>
           <a:p>
-            <a:pPr indent="0" marL="0">
+            <a:pPr marL="0" indent="0">
               <a:buNone/>
             </a:pPr>
             <a:r>
@@ -11276,7 +10867,7 @@
       </p:sp>
       <p:graphicFrame>
         <p:nvGraphicFramePr>
-          <p:cNvPr id="12" name="Chart 2" descr=""/>
+          <p:cNvPr id="12" name="Chart 2"/>
           <p:cNvGraphicFramePr/>
           <p:nvPr/>
         </p:nvGraphicFramePr>
@@ -11284,9 +10875,9 @@
           <a:off x="8138160" y="2286000"/>
           <a:ext cx="3474720" cy="3017520"/>
         </p:xfrm>
-        <a:graphic xmlns:a="http://schemas.openxmlformats.org/drawingml/2006/main">
+        <a:graphic>
           <a:graphicData uri="http://schemas.openxmlformats.org/drawingml/2006/chart">
-            <c:chart xmlns:c="http://schemas.openxmlformats.org/drawingml/2006/chart" r:id="rId3"/>
+            <c:chart xmlns:c="http://schemas.openxmlformats.org/drawingml/2006/chart" xmlns:r="http://schemas.openxmlformats.org/officeDocument/2006/relationships" r:id="rId5"/>
           </a:graphicData>
         </a:graphic>
       </p:graphicFrame>
@@ -11311,7 +10902,7 @@
           <a:bodyPr wrap="square" lIns="0" tIns="0" rIns="0" bIns="0" rtlCol="0" anchor="t"/>
           <a:lstStyle/>
           <a:p>
-            <a:pPr indent="0" marL="0">
+            <a:pPr marL="0" indent="0">
               <a:buNone/>
             </a:pPr>
             <a:r>
@@ -11350,7 +10941,7 @@
           <a:bodyPr wrap="square" lIns="0" tIns="0" rIns="0" bIns="0" rtlCol="0" anchor="ctr"/>
           <a:lstStyle/>
           <a:p>
-            <a:pPr indent="0" marL="0">
+            <a:pPr marL="0" indent="0">
               <a:buNone/>
             </a:pPr>
             <a:r>
@@ -11388,7 +10979,7 @@
           </a:prstGeom>
           <a:extLst>
             <a:ext uri="{C572A759-6A51-4108-AA02-DFA0A04FC94B}">
-              <ma14:wrappingTextBoxFlag xmlns:ma14="http://schemas.microsoft.com/office/mac/drawingml/2011/main" val="0"/>
+              <ma14:wrappingTextBoxFlag xmlns:ma14="http://schemas.microsoft.com/office/mac/drawingml/2011/main" xmlns="" val="0"/>
             </a:ext>
           </a:extLst>
         </p:spPr>
@@ -11409,7 +11000,7 @@
           <a:p>
             <a:pPr algn="r"/>
             <a:fld id="{F7021451-1387-4CA6-816F-3879F97B5CBC}" type="slidenum">
-              <a:rPr b="0" lang="en-US"/>
+              <a:rPr lang="en-US" b="0"/>
               <a:t>9</a:t>
             </a:fld>
             <a:endParaRPr lang="en-US"/>
@@ -11717,4 +11308,299 @@
     </a:ext>
   </a:extLst>
 </a:theme>
+</file>
+
+<file path=ppt/theme/theme2.xml><?xml version="1.0" encoding="utf-8"?>
+<a:theme xmlns:a="http://schemas.openxmlformats.org/drawingml/2006/main" name="Office Theme">
+  <a:themeElements>
+    <a:clrScheme name="Office">
+      <a:dk1>
+        <a:sysClr val="windowText" lastClr="000000"/>
+      </a:dk1>
+      <a:lt1>
+        <a:sysClr val="window" lastClr="FFFFFF"/>
+      </a:lt1>
+      <a:dk2>
+        <a:srgbClr val="44546A"/>
+      </a:dk2>
+      <a:lt2>
+        <a:srgbClr val="E7E6E6"/>
+      </a:lt2>
+      <a:accent1>
+        <a:srgbClr val="4472C4"/>
+      </a:accent1>
+      <a:accent2>
+        <a:srgbClr val="ED7D31"/>
+      </a:accent2>
+      <a:accent3>
+        <a:srgbClr val="A5A5A5"/>
+      </a:accent3>
+      <a:accent4>
+        <a:srgbClr val="FFC000"/>
+      </a:accent4>
+      <a:accent5>
+        <a:srgbClr val="5B9BD5"/>
+      </a:accent5>
+      <a:accent6>
+        <a:srgbClr val="70AD47"/>
+      </a:accent6>
+      <a:hlink>
+        <a:srgbClr val="0563C1"/>
+      </a:hlink>
+      <a:folHlink>
+        <a:srgbClr val="954F72"/>
+      </a:folHlink>
+    </a:clrScheme>
+    <a:fontScheme name="Office">
+      <a:majorFont>
+        <a:latin typeface="Calibri Light" panose="020F0302020204030204"/>
+        <a:ea typeface=""/>
+        <a:cs typeface=""/>
+        <a:font script="Jpan" typeface="游ゴシック Light"/>
+        <a:font script="Hang" typeface="맑은 고딕"/>
+        <a:font script="Hans" typeface="等线 Light"/>
+        <a:font script="Hant" typeface="新細明體"/>
+        <a:font script="Arab" typeface="Times New Roman"/>
+        <a:font script="Hebr" typeface="Times New Roman"/>
+        <a:font script="Thai" typeface="Angsana New"/>
+        <a:font script="Ethi" typeface="Nyala"/>
+        <a:font script="Beng" typeface="Vrinda"/>
+        <a:font script="Gujr" typeface="Shruti"/>
+        <a:font script="Khmr" typeface="MoolBoran"/>
+        <a:font script="Knda" typeface="Tunga"/>
+        <a:font script="Guru" typeface="Raavi"/>
+        <a:font script="Cans" typeface="Euphemia"/>
+        <a:font script="Cher" typeface="Plantagenet Cherokee"/>
+        <a:font script="Yiii" typeface="Microsoft Yi Baiti"/>
+        <a:font script="Tibt" typeface="Microsoft Himalaya"/>
+        <a:font script="Thaa" typeface="MV Boli"/>
+        <a:font script="Deva" typeface="Mangal"/>
+        <a:font script="Telu" typeface="Gautami"/>
+        <a:font script="Taml" typeface="Latha"/>
+        <a:font script="Syrc" typeface="Estrangelo Edessa"/>
+        <a:font script="Orya" typeface="Kalinga"/>
+        <a:font script="Mlym" typeface="Kartika"/>
+        <a:font script="Laoo" typeface="DokChampa"/>
+        <a:font script="Sinh" typeface="Iskoola Pota"/>
+        <a:font script="Mong" typeface="Mongolian Baiti"/>
+        <a:font script="Viet" typeface="Times New Roman"/>
+        <a:font script="Uigh" typeface="Microsoft Uighur"/>
+        <a:font script="Geor" typeface="Sylfaen"/>
+        <a:font script="Armn" typeface="Arial"/>
+        <a:font script="Bugi" typeface="Leelawadee UI"/>
+        <a:font script="Bopo" typeface="Microsoft JhengHei"/>
+        <a:font script="Java" typeface="Javanese Text"/>
+        <a:font script="Lisu" typeface="Segoe UI"/>
+        <a:font script="Mymr" typeface="Myanmar Text"/>
+        <a:font script="Nkoo" typeface="Ebrima"/>
+        <a:font script="Olck" typeface="Nirmala UI"/>
+        <a:font script="Osma" typeface="Ebrima"/>
+        <a:font script="Phag" typeface="Phagspa"/>
+        <a:font script="Syrn" typeface="Estrangelo Edessa"/>
+        <a:font script="Syrj" typeface="Estrangelo Edessa"/>
+        <a:font script="Syre" typeface="Estrangelo Edessa"/>
+        <a:font script="Sora" typeface="Nirmala UI"/>
+        <a:font script="Tale" typeface="Microsoft Tai Le"/>
+        <a:font script="Talu" typeface="Microsoft New Tai Lue"/>
+        <a:font script="Tfng" typeface="Ebrima"/>
+      </a:majorFont>
+      <a:minorFont>
+        <a:latin typeface="Calibri" panose="020F0502020204030204"/>
+        <a:ea typeface=""/>
+        <a:cs typeface=""/>
+        <a:font script="Jpan" typeface="游ゴシック"/>
+        <a:font script="Hang" typeface="맑은 고딕"/>
+        <a:font script="Hans" typeface="等线"/>
+        <a:font script="Hant" typeface="新細明體"/>
+        <a:font script="Arab" typeface="Arial"/>
+        <a:font script="Hebr" typeface="Arial"/>
+        <a:font script="Thai" typeface="Cordia New"/>
+        <a:font script="Ethi" typeface="Nyala"/>
+        <a:font script="Beng" typeface="Vrinda"/>
+        <a:font script="Gujr" typeface="Shruti"/>
+        <a:font script="Khmr" typeface="DaunPenh"/>
+        <a:font script="Knda" typeface="Tunga"/>
+        <a:font script="Guru" typeface="Raavi"/>
+        <a:font script="Cans" typeface="Euphemia"/>
+        <a:font script="Cher" typeface="Plantagenet Cherokee"/>
+        <a:font script="Yiii" typeface="Microsoft Yi Baiti"/>
+        <a:font script="Tibt" typeface="Microsoft Himalaya"/>
+        <a:font script="Thaa" typeface="MV Boli"/>
+        <a:font script="Deva" typeface="Mangal"/>
+        <a:font script="Telu" typeface="Gautami"/>
+        <a:font script="Taml" typeface="Latha"/>
+        <a:font script="Syrc" typeface="Estrangelo Edessa"/>
+        <a:font script="Orya" typeface="Kalinga"/>
+        <a:font script="Mlym" typeface="Kartika"/>
+        <a:font script="Laoo" typeface="DokChampa"/>
+        <a:font script="Sinh" typeface="Iskoola Pota"/>
+        <a:font script="Mong" typeface="Mongolian Baiti"/>
+        <a:font script="Viet" typeface="Arial"/>
+        <a:font script="Uigh" typeface="Microsoft Uighur"/>
+        <a:font script="Geor" typeface="Sylfaen"/>
+        <a:font script="Armn" typeface="Arial"/>
+        <a:font script="Bugi" typeface="Leelawadee UI"/>
+        <a:font script="Bopo" typeface="Microsoft JhengHei"/>
+        <a:font script="Java" typeface="Javanese Text"/>
+        <a:font script="Lisu" typeface="Segoe UI"/>
+        <a:font script="Mymr" typeface="Myanmar Text"/>
+        <a:font script="Nkoo" typeface="Ebrima"/>
+        <a:font script="Olck" typeface="Nirmala UI"/>
+        <a:font script="Osma" typeface="Ebrima"/>
+        <a:font script="Phag" typeface="Phagspa"/>
+        <a:font script="Syrn" typeface="Estrangelo Edessa"/>
+        <a:font script="Syrj" typeface="Estrangelo Edessa"/>
+        <a:font script="Syre" typeface="Estrangelo Edessa"/>
+        <a:font script="Sora" typeface="Nirmala UI"/>
+        <a:font script="Tale" typeface="Microsoft Tai Le"/>
+        <a:font script="Talu" typeface="Microsoft New Tai Lue"/>
+        <a:font script="Tfng" typeface="Ebrima"/>
+      </a:minorFont>
+    </a:fontScheme>
+    <a:fmtScheme name="Office">
+      <a:fillStyleLst>
+        <a:solidFill>
+          <a:schemeClr val="phClr"/>
+        </a:solidFill>
+        <a:gradFill rotWithShape="1">
+          <a:gsLst>
+            <a:gs pos="0">
+              <a:schemeClr val="phClr">
+                <a:lumMod val="110000"/>
+                <a:satMod val="105000"/>
+                <a:tint val="67000"/>
+              </a:schemeClr>
+            </a:gs>
+            <a:gs pos="50000">
+              <a:schemeClr val="phClr">
+                <a:lumMod val="105000"/>
+                <a:satMod val="103000"/>
+                <a:tint val="73000"/>
+              </a:schemeClr>
+            </a:gs>
+            <a:gs pos="100000">
+              <a:schemeClr val="phClr">
+                <a:lumMod val="105000"/>
+                <a:satMod val="109000"/>
+                <a:tint val="81000"/>
+              </a:schemeClr>
+            </a:gs>
+          </a:gsLst>
+          <a:lin ang="5400000" scaled="0"/>
+        </a:gradFill>
+        <a:gradFill rotWithShape="1">
+          <a:gsLst>
+            <a:gs pos="0">
+              <a:schemeClr val="phClr">
+                <a:satMod val="103000"/>
+                <a:lumMod val="102000"/>
+                <a:tint val="94000"/>
+              </a:schemeClr>
+            </a:gs>
+            <a:gs pos="50000">
+              <a:schemeClr val="phClr">
+                <a:satMod val="110000"/>
+                <a:lumMod val="100000"/>
+                <a:shade val="100000"/>
+              </a:schemeClr>
+            </a:gs>
+            <a:gs pos="100000">
+              <a:schemeClr val="phClr">
+                <a:lumMod val="99000"/>
+                <a:satMod val="120000"/>
+                <a:shade val="78000"/>
+              </a:schemeClr>
+            </a:gs>
+          </a:gsLst>
+          <a:lin ang="5400000" scaled="0"/>
+        </a:gradFill>
+      </a:fillStyleLst>
+      <a:lnStyleLst>
+        <a:ln w="6350" cap="flat" cmpd="sng" algn="ctr">
+          <a:solidFill>
+            <a:schemeClr val="phClr"/>
+          </a:solidFill>
+          <a:prstDash val="solid"/>
+          <a:miter lim="800000"/>
+        </a:ln>
+        <a:ln w="12700" cap="flat" cmpd="sng" algn="ctr">
+          <a:solidFill>
+            <a:schemeClr val="phClr"/>
+          </a:solidFill>
+          <a:prstDash val="solid"/>
+          <a:miter lim="800000"/>
+        </a:ln>
+        <a:ln w="19050" cap="flat" cmpd="sng" algn="ctr">
+          <a:solidFill>
+            <a:schemeClr val="phClr"/>
+          </a:solidFill>
+          <a:prstDash val="solid"/>
+          <a:miter lim="800000"/>
+        </a:ln>
+      </a:lnStyleLst>
+      <a:effectStyleLst>
+        <a:effectStyle>
+          <a:effectLst/>
+        </a:effectStyle>
+        <a:effectStyle>
+          <a:effectLst/>
+        </a:effectStyle>
+        <a:effectStyle>
+          <a:effectLst>
+            <a:outerShdw blurRad="57150" dist="19050" dir="5400000" algn="ctr" rotWithShape="0">
+              <a:srgbClr val="000000">
+                <a:alpha val="63000"/>
+              </a:srgbClr>
+            </a:outerShdw>
+          </a:effectLst>
+        </a:effectStyle>
+      </a:effectStyleLst>
+      <a:bgFillStyleLst>
+        <a:solidFill>
+          <a:schemeClr val="phClr"/>
+        </a:solidFill>
+        <a:solidFill>
+          <a:schemeClr val="phClr">
+            <a:tint val="95000"/>
+            <a:satMod val="170000"/>
+          </a:schemeClr>
+        </a:solidFill>
+        <a:gradFill rotWithShape="1">
+          <a:gsLst>
+            <a:gs pos="0">
+              <a:schemeClr val="phClr">
+                <a:tint val="93000"/>
+                <a:satMod val="150000"/>
+                <a:shade val="98000"/>
+                <a:lumMod val="102000"/>
+              </a:schemeClr>
+            </a:gs>
+            <a:gs pos="50000">
+              <a:schemeClr val="phClr">
+                <a:tint val="98000"/>
+                <a:satMod val="130000"/>
+                <a:shade val="90000"/>
+                <a:lumMod val="103000"/>
+              </a:schemeClr>
+            </a:gs>
+            <a:gs pos="100000">
+              <a:schemeClr val="phClr">
+                <a:shade val="63000"/>
+                <a:satMod val="120000"/>
+              </a:schemeClr>
+            </a:gs>
+          </a:gsLst>
+          <a:lin ang="5400000" scaled="0"/>
+        </a:gradFill>
+      </a:bgFillStyleLst>
+    </a:fmtScheme>
+  </a:themeElements>
+  <a:objectDefaults/>
+  <a:extraClrSchemeLst/>
+  <a:extLst>
+    <a:ext uri="{05A4C25C-085E-4340-85A3-A5531E510DB2}">
+      <thm15:themeFamily xmlns:thm15="http://schemas.microsoft.com/office/thememl/2012/main" name="Office Theme" id="{62F939B6-93AF-4DB8-9C6B-D6C7DFDC589F}" vid="{4A3C46E8-61CC-4603-A589-7422A47A8E4A}"/>
+    </a:ext>
+  </a:extLst>
+</a:theme>
 </file>